--- a/api/templates/project_update.pptx
+++ b/api/templates/project_update.pptx
@@ -2,7 +2,7 @@
 <file path=ppt/presentation.xml><?xml version="1.0" encoding="utf-8"?>
 <p:presentation xmlns:a="http://schemas.openxmlformats.org/drawingml/2006/main" xmlns:r="http://schemas.openxmlformats.org/officeDocument/2006/relationships" xmlns:p="http://schemas.openxmlformats.org/presentationml/2006/main" saveSubsetFonts="1">
   <p:sldMasterIdLst>
-    <p:sldMasterId id="2147483648" r:id="rId1"/>
+    <p:sldMasterId id="2147483652" r:id="rId1"/>
   </p:sldMasterIdLst>
   <p:sldIdLst>
     <p:sldId id="256" r:id="rId2"/>
@@ -15,7 +15,7 @@
     <a:defPPr>
       <a:defRPr lang="en-US"/>
     </a:defPPr>
-    <a:lvl1pPr marL="0" algn="l" defTabSz="914400" rtl="0" eaLnBrk="1" latinLnBrk="0" hangingPunct="1">
+    <a:lvl1pPr marL="0" algn="l" defTabSz="457200" rtl="0" eaLnBrk="1" latinLnBrk="0" hangingPunct="1">
       <a:defRPr sz="1800" kern="1200">
         <a:solidFill>
           <a:schemeClr val="tx1"/>
@@ -25,7 +25,7 @@
         <a:cs typeface="+mn-cs"/>
       </a:defRPr>
     </a:lvl1pPr>
-    <a:lvl2pPr marL="457200" algn="l" defTabSz="914400" rtl="0" eaLnBrk="1" latinLnBrk="0" hangingPunct="1">
+    <a:lvl2pPr marL="457200" algn="l" defTabSz="457200" rtl="0" eaLnBrk="1" latinLnBrk="0" hangingPunct="1">
       <a:defRPr sz="1800" kern="1200">
         <a:solidFill>
           <a:schemeClr val="tx1"/>
@@ -35,7 +35,7 @@
         <a:cs typeface="+mn-cs"/>
       </a:defRPr>
     </a:lvl2pPr>
-    <a:lvl3pPr marL="914400" algn="l" defTabSz="914400" rtl="0" eaLnBrk="1" latinLnBrk="0" hangingPunct="1">
+    <a:lvl3pPr marL="914400" algn="l" defTabSz="457200" rtl="0" eaLnBrk="1" latinLnBrk="0" hangingPunct="1">
       <a:defRPr sz="1800" kern="1200">
         <a:solidFill>
           <a:schemeClr val="tx1"/>
@@ -45,7 +45,7 @@
         <a:cs typeface="+mn-cs"/>
       </a:defRPr>
     </a:lvl3pPr>
-    <a:lvl4pPr marL="1371600" algn="l" defTabSz="914400" rtl="0" eaLnBrk="1" latinLnBrk="0" hangingPunct="1">
+    <a:lvl4pPr marL="1371600" algn="l" defTabSz="457200" rtl="0" eaLnBrk="1" latinLnBrk="0" hangingPunct="1">
       <a:defRPr sz="1800" kern="1200">
         <a:solidFill>
           <a:schemeClr val="tx1"/>
@@ -55,7 +55,7 @@
         <a:cs typeface="+mn-cs"/>
       </a:defRPr>
     </a:lvl4pPr>
-    <a:lvl5pPr marL="1828800" algn="l" defTabSz="914400" rtl="0" eaLnBrk="1" latinLnBrk="0" hangingPunct="1">
+    <a:lvl5pPr marL="1828800" algn="l" defTabSz="457200" rtl="0" eaLnBrk="1" latinLnBrk="0" hangingPunct="1">
       <a:defRPr sz="1800" kern="1200">
         <a:solidFill>
           <a:schemeClr val="tx1"/>
@@ -65,7 +65,7 @@
         <a:cs typeface="+mn-cs"/>
       </a:defRPr>
     </a:lvl5pPr>
-    <a:lvl6pPr marL="2286000" algn="l" defTabSz="914400" rtl="0" eaLnBrk="1" latinLnBrk="0" hangingPunct="1">
+    <a:lvl6pPr marL="2286000" algn="l" defTabSz="457200" rtl="0" eaLnBrk="1" latinLnBrk="0" hangingPunct="1">
       <a:defRPr sz="1800" kern="1200">
         <a:solidFill>
           <a:schemeClr val="tx1"/>
@@ -75,7 +75,7 @@
         <a:cs typeface="+mn-cs"/>
       </a:defRPr>
     </a:lvl6pPr>
-    <a:lvl7pPr marL="2743200" algn="l" defTabSz="914400" rtl="0" eaLnBrk="1" latinLnBrk="0" hangingPunct="1">
+    <a:lvl7pPr marL="2743200" algn="l" defTabSz="457200" rtl="0" eaLnBrk="1" latinLnBrk="0" hangingPunct="1">
       <a:defRPr sz="1800" kern="1200">
         <a:solidFill>
           <a:schemeClr val="tx1"/>
@@ -85,7 +85,7 @@
         <a:cs typeface="+mn-cs"/>
       </a:defRPr>
     </a:lvl7pPr>
-    <a:lvl8pPr marL="3200400" algn="l" defTabSz="914400" rtl="0" eaLnBrk="1" latinLnBrk="0" hangingPunct="1">
+    <a:lvl8pPr marL="3200400" algn="l" defTabSz="457200" rtl="0" eaLnBrk="1" latinLnBrk="0" hangingPunct="1">
       <a:defRPr sz="1800" kern="1200">
         <a:solidFill>
           <a:schemeClr val="tx1"/>
@@ -95,7 +95,7 @@
         <a:cs typeface="+mn-cs"/>
       </a:defRPr>
     </a:lvl8pPr>
-    <a:lvl9pPr marL="3657600" algn="l" defTabSz="914400" rtl="0" eaLnBrk="1" latinLnBrk="0" hangingPunct="1">
+    <a:lvl9pPr marL="3657600" algn="l" defTabSz="457200" rtl="0" eaLnBrk="1" latinLnBrk="0" hangingPunct="1">
       <a:defRPr sz="1800" kern="1200">
         <a:solidFill>
           <a:schemeClr val="tx1"/>
@@ -115,8 +115,18 @@
 </file>
 
 <file path=ppt/slideLayouts/slideLayout1.xml><?xml version="1.0" encoding="utf-8"?>
-<p:sldLayout xmlns:a="http://schemas.openxmlformats.org/drawingml/2006/main" xmlns:r="http://schemas.openxmlformats.org/officeDocument/2006/relationships" xmlns:p="http://schemas.openxmlformats.org/presentationml/2006/main" type="title" preserve="1">
+<p:sldLayout xmlns:a="http://schemas.openxmlformats.org/drawingml/2006/main" xmlns:r="http://schemas.openxmlformats.org/officeDocument/2006/relationships" xmlns:p="http://schemas.openxmlformats.org/presentationml/2006/main" showMasterSp="0" type="title" preserve="1">
   <p:cSld name="Title Slide">
+    <p:bg>
+      <p:bgPr>
+        <a:solidFill>
+          <a:schemeClr val="bg2">
+            <a:lumMod val="75000"/>
+          </a:schemeClr>
+        </a:solidFill>
+        <a:effectLst/>
+      </p:bgPr>
+    </p:bg>
     <p:spTree>
       <p:nvGrpSpPr>
         <p:cNvPr id="1" name=""/>
@@ -133,13 +143,7 @@
       </p:grpSpPr>
       <p:sp>
         <p:nvSpPr>
-          <p:cNvPr id="2" name="Title">
-            <a:extLst>
-              <a:ext uri="{FF2B5EF4-FFF2-40B4-BE49-F238E27FC236}">
-                <a16:creationId xmlns:a16="http://schemas.microsoft.com/office/drawing/2014/main" id="{27117B4D-F55B-07E8-1103-ABCA060EB175}"/>
-              </a:ext>
-            </a:extLst>
-          </p:cNvPr>
+          <p:cNvPr id="2" name="Title 1"/>
           <p:cNvSpPr>
             <a:spLocks noGrp="1"/>
           </p:cNvSpPr>
@@ -149,15 +153,24 @@
         </p:nvSpPr>
         <p:spPr>
           <a:xfrm>
-            <a:off x="1524000" y="1122363"/>
-            <a:ext cx="9144000" cy="2387600"/>
+            <a:off x="1261872" y="758952"/>
+            <a:ext cx="9418320" cy="4041648"/>
           </a:xfrm>
         </p:spPr>
         <p:txBody>
-          <a:bodyPr anchor="b"/>
+          <a:bodyPr anchor="b">
+            <a:normAutofit/>
+          </a:bodyPr>
           <a:lstStyle>
-            <a:lvl1pPr algn="ctr">
-              <a:defRPr sz="6000"/>
+            <a:lvl1pPr algn="l">
+              <a:lnSpc>
+                <a:spcPct val="85000"/>
+              </a:lnSpc>
+              <a:defRPr sz="7200" baseline="0">
+                <a:solidFill>
+                  <a:schemeClr val="tx1"/>
+                </a:solidFill>
+              </a:defRPr>
             </a:lvl1pPr>
           </a:lstStyle>
           <a:p>
@@ -165,19 +178,13 @@
               <a:rPr lang="en-US"/>
               <a:t>Click to edit Master title style</a:t>
             </a:r>
-            <a:endParaRPr lang="en-GB"/>
-          </a:p>
-        </p:txBody>
-      </p:sp>
-      <p:sp>
-        <p:nvSpPr>
-          <p:cNvPr id="3" name="Subtitle">
-            <a:extLst>
-              <a:ext uri="{FF2B5EF4-FFF2-40B4-BE49-F238E27FC236}">
-                <a16:creationId xmlns:a16="http://schemas.microsoft.com/office/drawing/2014/main" id="{2103747F-2B09-8BEE-9234-36E91841637D}"/>
-              </a:ext>
-            </a:extLst>
-          </p:cNvPr>
+            <a:endParaRPr lang="en-US" dirty="0"/>
+          </a:p>
+        </p:txBody>
+      </p:sp>
+      <p:sp>
+        <p:nvSpPr>
+          <p:cNvPr id="3" name="Subtitle 2"/>
           <p:cNvSpPr>
             <a:spLocks noGrp="1"/>
           </p:cNvSpPr>
@@ -187,48 +194,56 @@
         </p:nvSpPr>
         <p:spPr>
           <a:xfrm>
-            <a:off x="1524000" y="3602038"/>
-            <a:ext cx="9144000" cy="1655762"/>
+            <a:off x="1261872" y="4800600"/>
+            <a:ext cx="9418320" cy="1691640"/>
           </a:xfrm>
         </p:spPr>
         <p:txBody>
-          <a:bodyPr/>
+          <a:bodyPr>
+            <a:normAutofit/>
+          </a:bodyPr>
           <a:lstStyle>
-            <a:lvl1pPr marL="0" indent="0" algn="ctr">
-              <a:buNone/>
-              <a:defRPr sz="2400"/>
+            <a:lvl1pPr marL="0" indent="0" algn="l">
+              <a:buNone/>
+              <a:defRPr sz="2200" baseline="0">
+                <a:solidFill>
+                  <a:schemeClr val="tx1">
+                    <a:lumMod val="75000"/>
+                  </a:schemeClr>
+                </a:solidFill>
+              </a:defRPr>
             </a:lvl1pPr>
             <a:lvl2pPr marL="457200" indent="0" algn="ctr">
               <a:buNone/>
-              <a:defRPr sz="2000"/>
+              <a:defRPr sz="2200"/>
             </a:lvl2pPr>
             <a:lvl3pPr marL="914400" indent="0" algn="ctr">
               <a:buNone/>
-              <a:defRPr sz="1800"/>
+              <a:defRPr sz="2200"/>
             </a:lvl3pPr>
             <a:lvl4pPr marL="1371600" indent="0" algn="ctr">
               <a:buNone/>
-              <a:defRPr sz="1600"/>
+              <a:defRPr sz="2000"/>
             </a:lvl4pPr>
             <a:lvl5pPr marL="1828800" indent="0" algn="ctr">
               <a:buNone/>
-              <a:defRPr sz="1600"/>
+              <a:defRPr sz="2000"/>
             </a:lvl5pPr>
             <a:lvl6pPr marL="2286000" indent="0" algn="ctr">
               <a:buNone/>
-              <a:defRPr sz="1600"/>
+              <a:defRPr sz="2000"/>
             </a:lvl6pPr>
             <a:lvl7pPr marL="2743200" indent="0" algn="ctr">
               <a:buNone/>
-              <a:defRPr sz="1600"/>
+              <a:defRPr sz="2000"/>
             </a:lvl7pPr>
             <a:lvl8pPr marL="3200400" indent="0" algn="ctr">
               <a:buNone/>
-              <a:defRPr sz="1600"/>
+              <a:defRPr sz="2000"/>
             </a:lvl8pPr>
             <a:lvl9pPr marL="3657600" indent="0" algn="ctr">
               <a:buNone/>
-              <a:defRPr sz="1600"/>
+              <a:defRPr sz="2000"/>
             </a:lvl9pPr>
           </a:lstStyle>
           <a:p>
@@ -236,14 +251,498 @@
               <a:rPr lang="en-US"/>
               <a:t>Click to edit Master subtitle style</a:t>
             </a:r>
-            <a:endParaRPr lang="en-GB"/>
-          </a:p>
-        </p:txBody>
+            <a:endParaRPr lang="en-US" dirty="0"/>
+          </a:p>
+        </p:txBody>
+      </p:sp>
+      <p:sp>
+        <p:nvSpPr>
+          <p:cNvPr id="4" name="Date Placeholder 3"/>
+          <p:cNvSpPr>
+            <a:spLocks noGrp="1"/>
+          </p:cNvSpPr>
+          <p:nvPr>
+            <p:ph type="dt" sz="half" idx="10"/>
+          </p:nvPr>
+        </p:nvSpPr>
+        <p:spPr/>
+        <p:txBody>
+          <a:bodyPr/>
+          <a:lstStyle>
+            <a:lvl1pPr>
+              <a:defRPr>
+                <a:solidFill>
+                  <a:schemeClr val="tx1">
+                    <a:lumMod val="50000"/>
+                  </a:schemeClr>
+                </a:solidFill>
+              </a:defRPr>
+            </a:lvl1pPr>
+          </a:lstStyle>
+          <a:p>
+            <a:fld id="{9E016143-E03C-4CFD-AFDC-14E5BDEA754C}" type="datetimeFigureOut">
+              <a:rPr lang="en-US" dirty="0"/>
+              <a:t>6/5/2026</a:t>
+            </a:fld>
+            <a:endParaRPr lang="en-US" dirty="0"/>
+          </a:p>
+        </p:txBody>
+      </p:sp>
+      <p:sp>
+        <p:nvSpPr>
+          <p:cNvPr id="5" name="Footer Placeholder 4"/>
+          <p:cNvSpPr>
+            <a:spLocks noGrp="1"/>
+          </p:cNvSpPr>
+          <p:nvPr>
+            <p:ph type="ftr" sz="quarter" idx="11"/>
+          </p:nvPr>
+        </p:nvSpPr>
+        <p:spPr/>
+        <p:txBody>
+          <a:bodyPr/>
+          <a:lstStyle>
+            <a:lvl1pPr>
+              <a:defRPr>
+                <a:solidFill>
+                  <a:schemeClr val="tx1">
+                    <a:lumMod val="65000"/>
+                  </a:schemeClr>
+                </a:solidFill>
+              </a:defRPr>
+            </a:lvl1pPr>
+          </a:lstStyle>
+          <a:p>
+            <a:endParaRPr lang="en-US" dirty="0"/>
+          </a:p>
+        </p:txBody>
+      </p:sp>
+      <p:sp>
+        <p:nvSpPr>
+          <p:cNvPr id="6" name="Slide Number Placeholder 5"/>
+          <p:cNvSpPr>
+            <a:spLocks noGrp="1"/>
+          </p:cNvSpPr>
+          <p:nvPr>
+            <p:ph type="sldNum" sz="quarter" idx="12"/>
+          </p:nvPr>
+        </p:nvSpPr>
+        <p:spPr/>
+        <p:txBody>
+          <a:bodyPr/>
+          <a:lstStyle>
+            <a:lvl1pPr>
+              <a:defRPr>
+                <a:solidFill>
+                  <a:schemeClr val="tx1">
+                    <a:lumMod val="65000"/>
+                  </a:schemeClr>
+                </a:solidFill>
+              </a:defRPr>
+            </a:lvl1pPr>
+          </a:lstStyle>
+          <a:p>
+            <a:fld id="{4FAB73BC-B049-4115-A692-8D63A059BFB8}" type="slidenum">
+              <a:rPr lang="en-US" dirty="0"/>
+              <a:pPr/>
+              <a:t>‹#›</a:t>
+            </a:fld>
+            <a:endParaRPr lang="en-US" dirty="0"/>
+          </a:p>
+        </p:txBody>
+      </p:sp>
+      <p:sp>
+        <p:nvSpPr>
+          <p:cNvPr id="7" name="Rectangle 6"/>
+          <p:cNvSpPr/>
+          <p:nvPr/>
+        </p:nvSpPr>
+        <p:spPr>
+          <a:xfrm>
+            <a:off x="0" y="0"/>
+            <a:ext cx="457200" cy="6858000"/>
+          </a:xfrm>
+          <a:prstGeom prst="rect">
+            <a:avLst/>
+          </a:prstGeom>
+          <a:solidFill>
+            <a:schemeClr val="accent1"/>
+          </a:solidFill>
+          <a:ln>
+            <a:noFill/>
+          </a:ln>
+        </p:spPr>
+        <p:style>
+          <a:lnRef idx="2">
+            <a:schemeClr val="accent1">
+              <a:shade val="50000"/>
+            </a:schemeClr>
+          </a:lnRef>
+          <a:fillRef idx="1">
+            <a:schemeClr val="accent1"/>
+          </a:fillRef>
+          <a:effectRef idx="0">
+            <a:schemeClr val="accent1"/>
+          </a:effectRef>
+          <a:fontRef idx="minor">
+            <a:schemeClr val="lt1"/>
+          </a:fontRef>
+        </p:style>
       </p:sp>
     </p:spTree>
     <p:extLst>
       <p:ext uri="{BB962C8B-B14F-4D97-AF65-F5344CB8AC3E}">
-        <p14:creationId xmlns:p14="http://schemas.microsoft.com/office/powerpoint/2010/main" val="2098846355"/>
+        <p14:creationId xmlns:p14="http://schemas.microsoft.com/office/powerpoint/2010/main" val="4196806382"/>
+      </p:ext>
+    </p:extLst>
+  </p:cSld>
+  <p:clrMapOvr>
+    <a:overrideClrMapping bg1="dk1" tx1="lt1" bg2="dk2" tx2="lt2" accent1="accent1" accent2="accent2" accent3="accent3" accent4="accent4" accent5="accent5" accent6="accent6" hlink="hlink" folHlink="folHlink"/>
+  </p:clrMapOvr>
+</p:sldLayout>
+</file>
+
+<file path=ppt/slideLayouts/slideLayout10.xml><?xml version="1.0" encoding="utf-8"?>
+<p:sldLayout xmlns:a="http://schemas.openxmlformats.org/drawingml/2006/main" xmlns:r="http://schemas.openxmlformats.org/officeDocument/2006/relationships" xmlns:p="http://schemas.openxmlformats.org/presentationml/2006/main" type="vertTx" preserve="1">
+  <p:cSld name="Title and Vertical Text">
+    <p:spTree>
+      <p:nvGrpSpPr>
+        <p:cNvPr id="1" name=""/>
+        <p:cNvGrpSpPr/>
+        <p:nvPr/>
+      </p:nvGrpSpPr>
+      <p:grpSpPr>
+        <a:xfrm>
+          <a:off x="0" y="0"/>
+          <a:ext cx="0" cy="0"/>
+          <a:chOff x="0" y="0"/>
+          <a:chExt cx="0" cy="0"/>
+        </a:xfrm>
+      </p:grpSpPr>
+      <p:sp>
+        <p:nvSpPr>
+          <p:cNvPr id="2" name="Title 1"/>
+          <p:cNvSpPr>
+            <a:spLocks noGrp="1"/>
+          </p:cNvSpPr>
+          <p:nvPr>
+            <p:ph type="title"/>
+          </p:nvPr>
+        </p:nvSpPr>
+        <p:spPr/>
+        <p:txBody>
+          <a:bodyPr/>
+          <a:lstStyle/>
+          <a:p>
+            <a:r>
+              <a:rPr lang="en-US"/>
+              <a:t>Click to edit Master title style</a:t>
+            </a:r>
+            <a:endParaRPr lang="en-US" dirty="0"/>
+          </a:p>
+        </p:txBody>
+      </p:sp>
+      <p:sp>
+        <p:nvSpPr>
+          <p:cNvPr id="3" name="Vertical Text Placeholder 2"/>
+          <p:cNvSpPr>
+            <a:spLocks noGrp="1"/>
+          </p:cNvSpPr>
+          <p:nvPr>
+            <p:ph type="body" orient="vert" idx="1"/>
+          </p:nvPr>
+        </p:nvSpPr>
+        <p:spPr/>
+        <p:txBody>
+          <a:bodyPr vert="eaVert"/>
+          <a:lstStyle/>
+          <a:p>
+            <a:pPr lvl="0"/>
+            <a:r>
+              <a:rPr lang="en-US"/>
+              <a:t>Click to edit Master text styles</a:t>
+            </a:r>
+          </a:p>
+          <a:p>
+            <a:pPr lvl="1"/>
+            <a:r>
+              <a:rPr lang="en-US"/>
+              <a:t>Second level</a:t>
+            </a:r>
+          </a:p>
+          <a:p>
+            <a:pPr lvl="2"/>
+            <a:r>
+              <a:rPr lang="en-US"/>
+              <a:t>Third level</a:t>
+            </a:r>
+          </a:p>
+          <a:p>
+            <a:pPr lvl="3"/>
+            <a:r>
+              <a:rPr lang="en-US"/>
+              <a:t>Fourth level</a:t>
+            </a:r>
+          </a:p>
+          <a:p>
+            <a:pPr lvl="4"/>
+            <a:r>
+              <a:rPr lang="en-US"/>
+              <a:t>Fifth level</a:t>
+            </a:r>
+            <a:endParaRPr lang="en-US" dirty="0"/>
+          </a:p>
+        </p:txBody>
+      </p:sp>
+      <p:sp>
+        <p:nvSpPr>
+          <p:cNvPr id="4" name="Date Placeholder 3"/>
+          <p:cNvSpPr>
+            <a:spLocks noGrp="1"/>
+          </p:cNvSpPr>
+          <p:nvPr>
+            <p:ph type="dt" sz="half" idx="10"/>
+          </p:nvPr>
+        </p:nvSpPr>
+        <p:spPr/>
+        <p:txBody>
+          <a:bodyPr/>
+          <a:lstStyle/>
+          <a:p>
+            <a:fld id="{C033E54A-A8CA-48C1-9504-691B58049D29}" type="datetimeFigureOut">
+              <a:rPr lang="en-US" dirty="0"/>
+              <a:t>6/5/2026</a:t>
+            </a:fld>
+            <a:endParaRPr lang="en-US" dirty="0"/>
+          </a:p>
+        </p:txBody>
+      </p:sp>
+      <p:sp>
+        <p:nvSpPr>
+          <p:cNvPr id="5" name="Footer Placeholder 4"/>
+          <p:cNvSpPr>
+            <a:spLocks noGrp="1"/>
+          </p:cNvSpPr>
+          <p:nvPr>
+            <p:ph type="ftr" sz="quarter" idx="11"/>
+          </p:nvPr>
+        </p:nvSpPr>
+        <p:spPr/>
+        <p:txBody>
+          <a:bodyPr/>
+          <a:lstStyle/>
+          <a:p>
+            <a:endParaRPr lang="en-US" dirty="0"/>
+          </a:p>
+        </p:txBody>
+      </p:sp>
+      <p:sp>
+        <p:nvSpPr>
+          <p:cNvPr id="6" name="Slide Number Placeholder 5"/>
+          <p:cNvSpPr>
+            <a:spLocks noGrp="1"/>
+          </p:cNvSpPr>
+          <p:nvPr>
+            <p:ph type="sldNum" sz="quarter" idx="12"/>
+          </p:nvPr>
+        </p:nvSpPr>
+        <p:spPr/>
+        <p:txBody>
+          <a:bodyPr/>
+          <a:lstStyle/>
+          <a:p>
+            <a:fld id="{4FAB73BC-B049-4115-A692-8D63A059BFB8}" type="slidenum">
+              <a:rPr lang="en-US" dirty="0"/>
+              <a:t>‹#›</a:t>
+            </a:fld>
+            <a:endParaRPr lang="en-US" dirty="0"/>
+          </a:p>
+        </p:txBody>
+      </p:sp>
+    </p:spTree>
+    <p:extLst>
+      <p:ext uri="{BB962C8B-B14F-4D97-AF65-F5344CB8AC3E}">
+        <p14:creationId xmlns:p14="http://schemas.microsoft.com/office/powerpoint/2010/main" val="97114099"/>
+      </p:ext>
+    </p:extLst>
+  </p:cSld>
+  <p:clrMapOvr>
+    <a:masterClrMapping/>
+  </p:clrMapOvr>
+</p:sldLayout>
+</file>
+
+<file path=ppt/slideLayouts/slideLayout11.xml><?xml version="1.0" encoding="utf-8"?>
+<p:sldLayout xmlns:a="http://schemas.openxmlformats.org/drawingml/2006/main" xmlns:r="http://schemas.openxmlformats.org/officeDocument/2006/relationships" xmlns:p="http://schemas.openxmlformats.org/presentationml/2006/main" type="vertTitleAndTx" preserve="1">
+  <p:cSld name="Vertical Title and Text">
+    <p:spTree>
+      <p:nvGrpSpPr>
+        <p:cNvPr id="1" name=""/>
+        <p:cNvGrpSpPr/>
+        <p:nvPr/>
+      </p:nvGrpSpPr>
+      <p:grpSpPr>
+        <a:xfrm>
+          <a:off x="0" y="0"/>
+          <a:ext cx="0" cy="0"/>
+          <a:chOff x="0" y="0"/>
+          <a:chExt cx="0" cy="0"/>
+        </a:xfrm>
+      </p:grpSpPr>
+      <p:sp>
+        <p:nvSpPr>
+          <p:cNvPr id="2" name="Vertical Title 1"/>
+          <p:cNvSpPr>
+            <a:spLocks noGrp="1"/>
+          </p:cNvSpPr>
+          <p:nvPr>
+            <p:ph type="title" orient="vert"/>
+          </p:nvPr>
+        </p:nvSpPr>
+        <p:spPr>
+          <a:xfrm>
+            <a:off x="8648700" y="381000"/>
+            <a:ext cx="2476500" cy="5897562"/>
+          </a:xfrm>
+        </p:spPr>
+        <p:txBody>
+          <a:bodyPr vert="eaVert"/>
+          <a:lstStyle/>
+          <a:p>
+            <a:r>
+              <a:rPr lang="en-US"/>
+              <a:t>Click to edit Master title style</a:t>
+            </a:r>
+            <a:endParaRPr lang="en-US" dirty="0"/>
+          </a:p>
+        </p:txBody>
+      </p:sp>
+      <p:sp>
+        <p:nvSpPr>
+          <p:cNvPr id="3" name="Vertical Text Placeholder 2"/>
+          <p:cNvSpPr>
+            <a:spLocks noGrp="1"/>
+          </p:cNvSpPr>
+          <p:nvPr>
+            <p:ph type="body" orient="vert" idx="1"/>
+          </p:nvPr>
+        </p:nvSpPr>
+        <p:spPr>
+          <a:xfrm>
+            <a:off x="762000" y="381000"/>
+            <a:ext cx="7734300" cy="5897562"/>
+          </a:xfrm>
+        </p:spPr>
+        <p:txBody>
+          <a:bodyPr vert="eaVert"/>
+          <a:lstStyle/>
+          <a:p>
+            <a:pPr lvl="0"/>
+            <a:r>
+              <a:rPr lang="en-US"/>
+              <a:t>Click to edit Master text styles</a:t>
+            </a:r>
+          </a:p>
+          <a:p>
+            <a:pPr lvl="1"/>
+            <a:r>
+              <a:rPr lang="en-US"/>
+              <a:t>Second level</a:t>
+            </a:r>
+          </a:p>
+          <a:p>
+            <a:pPr lvl="2"/>
+            <a:r>
+              <a:rPr lang="en-US"/>
+              <a:t>Third level</a:t>
+            </a:r>
+          </a:p>
+          <a:p>
+            <a:pPr lvl="3"/>
+            <a:r>
+              <a:rPr lang="en-US"/>
+              <a:t>Fourth level</a:t>
+            </a:r>
+          </a:p>
+          <a:p>
+            <a:pPr lvl="4"/>
+            <a:r>
+              <a:rPr lang="en-US"/>
+              <a:t>Fifth level</a:t>
+            </a:r>
+            <a:endParaRPr lang="en-US" dirty="0"/>
+          </a:p>
+        </p:txBody>
+      </p:sp>
+      <p:sp>
+        <p:nvSpPr>
+          <p:cNvPr id="4" name="Date Placeholder 3"/>
+          <p:cNvSpPr>
+            <a:spLocks noGrp="1"/>
+          </p:cNvSpPr>
+          <p:nvPr>
+            <p:ph type="dt" sz="half" idx="10"/>
+          </p:nvPr>
+        </p:nvSpPr>
+        <p:spPr/>
+        <p:txBody>
+          <a:bodyPr/>
+          <a:lstStyle/>
+          <a:p>
+            <a:fld id="{B5F6C806-BBF7-471C-9527-881CE2266695}" type="datetimeFigureOut">
+              <a:rPr lang="en-US" dirty="0"/>
+              <a:t>6/5/2026</a:t>
+            </a:fld>
+            <a:endParaRPr lang="en-US" dirty="0"/>
+          </a:p>
+        </p:txBody>
+      </p:sp>
+      <p:sp>
+        <p:nvSpPr>
+          <p:cNvPr id="5" name="Footer Placeholder 4"/>
+          <p:cNvSpPr>
+            <a:spLocks noGrp="1"/>
+          </p:cNvSpPr>
+          <p:nvPr>
+            <p:ph type="ftr" sz="quarter" idx="11"/>
+          </p:nvPr>
+        </p:nvSpPr>
+        <p:spPr/>
+        <p:txBody>
+          <a:bodyPr/>
+          <a:lstStyle/>
+          <a:p>
+            <a:endParaRPr lang="en-US" dirty="0"/>
+          </a:p>
+        </p:txBody>
+      </p:sp>
+      <p:sp>
+        <p:nvSpPr>
+          <p:cNvPr id="6" name="Slide Number Placeholder 5"/>
+          <p:cNvSpPr>
+            <a:spLocks noGrp="1"/>
+          </p:cNvSpPr>
+          <p:nvPr>
+            <p:ph type="sldNum" sz="quarter" idx="12"/>
+          </p:nvPr>
+        </p:nvSpPr>
+        <p:spPr/>
+        <p:txBody>
+          <a:bodyPr/>
+          <a:lstStyle/>
+          <a:p>
+            <a:fld id="{4FAB73BC-B049-4115-A692-8D63A059BFB8}" type="slidenum">
+              <a:rPr lang="en-US" dirty="0"/>
+              <a:t>‹#›</a:t>
+            </a:fld>
+            <a:endParaRPr lang="en-US" dirty="0"/>
+          </a:p>
+        </p:txBody>
+      </p:sp>
+    </p:spTree>
+    <p:extLst>
+      <p:ext uri="{BB962C8B-B14F-4D97-AF65-F5344CB8AC3E}">
+        <p14:creationId xmlns:p14="http://schemas.microsoft.com/office/powerpoint/2010/main" val="995955179"/>
       </p:ext>
     </p:extLst>
   </p:cSld>
@@ -272,13 +771,7 @@
       </p:grpSpPr>
       <p:sp>
         <p:nvSpPr>
-          <p:cNvPr id="2" name="Title">
-            <a:extLst>
-              <a:ext uri="{FF2B5EF4-FFF2-40B4-BE49-F238E27FC236}">
-                <a16:creationId xmlns:a16="http://schemas.microsoft.com/office/drawing/2014/main" id="{FC3A8FBD-1A0C-8D7A-ED79-054BF73C11EF}"/>
-              </a:ext>
-            </a:extLst>
-          </p:cNvPr>
+          <p:cNvPr id="2" name="Title 1"/>
           <p:cNvSpPr>
             <a:spLocks noGrp="1"/>
           </p:cNvSpPr>
@@ -295,19 +788,13 @@
               <a:rPr lang="en-US"/>
               <a:t>Click to edit Master title style</a:t>
             </a:r>
-            <a:endParaRPr lang="en-GB"/>
-          </a:p>
-        </p:txBody>
-      </p:sp>
-      <p:sp>
-        <p:nvSpPr>
-          <p:cNvPr id="3" name="Body">
-            <a:extLst>
-              <a:ext uri="{FF2B5EF4-FFF2-40B4-BE49-F238E27FC236}">
-                <a16:creationId xmlns:a16="http://schemas.microsoft.com/office/drawing/2014/main" id="{79B38F65-7A12-DE63-C507-20F8AF05708B}"/>
-              </a:ext>
-            </a:extLst>
-          </p:cNvPr>
+            <a:endParaRPr lang="en-US" dirty="0"/>
+          </a:p>
+        </p:txBody>
+      </p:sp>
+      <p:sp>
+        <p:nvSpPr>
+          <p:cNvPr id="3" name="Content Placeholder 2"/>
           <p:cNvSpPr>
             <a:spLocks noGrp="1"/>
           </p:cNvSpPr>
@@ -353,14 +840,79 @@
               <a:rPr lang="en-US"/>
               <a:t>Fifth level</a:t>
             </a:r>
-            <a:endParaRPr lang="en-GB"/>
+            <a:endParaRPr lang="en-US" dirty="0"/>
+          </a:p>
+        </p:txBody>
+      </p:sp>
+      <p:sp>
+        <p:nvSpPr>
+          <p:cNvPr id="4" name="Date Placeholder 3"/>
+          <p:cNvSpPr>
+            <a:spLocks noGrp="1"/>
+          </p:cNvSpPr>
+          <p:nvPr>
+            <p:ph type="dt" sz="half" idx="10"/>
+          </p:nvPr>
+        </p:nvSpPr>
+        <p:spPr/>
+        <p:txBody>
+          <a:bodyPr/>
+          <a:lstStyle/>
+          <a:p>
+            <a:fld id="{78C94063-DF36-4330-A365-08DA1FA5B7D6}" type="datetimeFigureOut">
+              <a:rPr lang="en-US" dirty="0"/>
+              <a:t>6/5/2026</a:t>
+            </a:fld>
+            <a:endParaRPr lang="en-US" dirty="0"/>
+          </a:p>
+        </p:txBody>
+      </p:sp>
+      <p:sp>
+        <p:nvSpPr>
+          <p:cNvPr id="5" name="Footer Placeholder 4"/>
+          <p:cNvSpPr>
+            <a:spLocks noGrp="1"/>
+          </p:cNvSpPr>
+          <p:nvPr>
+            <p:ph type="ftr" sz="quarter" idx="11"/>
+          </p:nvPr>
+        </p:nvSpPr>
+        <p:spPr/>
+        <p:txBody>
+          <a:bodyPr/>
+          <a:lstStyle/>
+          <a:p>
+            <a:endParaRPr lang="en-US" dirty="0"/>
+          </a:p>
+        </p:txBody>
+      </p:sp>
+      <p:sp>
+        <p:nvSpPr>
+          <p:cNvPr id="6" name="Slide Number Placeholder 5"/>
+          <p:cNvSpPr>
+            <a:spLocks noGrp="1"/>
+          </p:cNvSpPr>
+          <p:nvPr>
+            <p:ph type="sldNum" sz="quarter" idx="12"/>
+          </p:nvPr>
+        </p:nvSpPr>
+        <p:spPr/>
+        <p:txBody>
+          <a:bodyPr/>
+          <a:lstStyle/>
+          <a:p>
+            <a:fld id="{4FAB73BC-B049-4115-A692-8D63A059BFB8}" type="slidenum">
+              <a:rPr lang="en-US" dirty="0"/>
+              <a:t>‹#›</a:t>
+            </a:fld>
+            <a:endParaRPr lang="en-US" dirty="0"/>
           </a:p>
         </p:txBody>
       </p:sp>
     </p:spTree>
     <p:extLst>
       <p:ext uri="{BB962C8B-B14F-4D97-AF65-F5344CB8AC3E}">
-        <p14:creationId xmlns:p14="http://schemas.microsoft.com/office/powerpoint/2010/main" val="2102564540"/>
+        <p14:creationId xmlns:p14="http://schemas.microsoft.com/office/powerpoint/2010/main" val="1501795637"/>
       </p:ext>
     </p:extLst>
   </p:cSld>
@@ -371,8 +923,8 @@
 </file>
 
 <file path=ppt/slideLayouts/slideLayout3.xml><?xml version="1.0" encoding="utf-8"?>
-<p:sldLayout xmlns:a="http://schemas.openxmlformats.org/drawingml/2006/main" xmlns:r="http://schemas.openxmlformats.org/officeDocument/2006/relationships" xmlns:p="http://schemas.openxmlformats.org/presentationml/2006/main" type="obj" preserve="1">
-  <p:cSld name="1_Title and Content">
+<p:sldLayout xmlns:a="http://schemas.openxmlformats.org/drawingml/2006/main" xmlns:r="http://schemas.openxmlformats.org/officeDocument/2006/relationships" xmlns:p="http://schemas.openxmlformats.org/presentationml/2006/main" type="secHead" preserve="1">
+  <p:cSld name="Section Header">
     <p:spTree>
       <p:nvGrpSpPr>
         <p:cNvPr id="1" name=""/>
@@ -389,13 +941,7 @@
       </p:grpSpPr>
       <p:sp>
         <p:nvSpPr>
-          <p:cNvPr id="2" name="Title">
-            <a:extLst>
-              <a:ext uri="{FF2B5EF4-FFF2-40B4-BE49-F238E27FC236}">
-                <a16:creationId xmlns:a16="http://schemas.microsoft.com/office/drawing/2014/main" id="{FC3A8FBD-1A0C-8D7A-ED79-054BF73C11EF}"/>
-              </a:ext>
-            </a:extLst>
-          </p:cNvPr>
+          <p:cNvPr id="2" name="Title 1"/>
           <p:cNvSpPr>
             <a:spLocks noGrp="1"/>
           </p:cNvSpPr>
@@ -403,39 +949,146 @@
             <p:ph type="title"/>
           </p:nvPr>
         </p:nvSpPr>
-        <p:spPr/>
-        <p:txBody>
-          <a:bodyPr/>
-          <a:lstStyle/>
+        <p:spPr>
+          <a:xfrm>
+            <a:off x="1261872" y="758952"/>
+            <a:ext cx="9418320" cy="4041648"/>
+          </a:xfrm>
+        </p:spPr>
+        <p:txBody>
+          <a:bodyPr anchor="b">
+            <a:normAutofit/>
+          </a:bodyPr>
+          <a:lstStyle>
+            <a:lvl1pPr>
+              <a:lnSpc>
+                <a:spcPct val="85000"/>
+              </a:lnSpc>
+              <a:defRPr sz="7200" b="0"/>
+            </a:lvl1pPr>
+          </a:lstStyle>
           <a:p>
             <a:r>
               <a:rPr lang="en-US"/>
               <a:t>Click to edit Master title style</a:t>
             </a:r>
-            <a:endParaRPr lang="en-GB"/>
-          </a:p>
-        </p:txBody>
-      </p:sp>
-      <p:sp>
-        <p:nvSpPr>
-          <p:cNvPr id="3" name="Body">
-            <a:extLst>
-              <a:ext uri="{FF2B5EF4-FFF2-40B4-BE49-F238E27FC236}">
-                <a16:creationId xmlns:a16="http://schemas.microsoft.com/office/drawing/2014/main" id="{79B38F65-7A12-DE63-C507-20F8AF05708B}"/>
-              </a:ext>
-            </a:extLst>
-          </p:cNvPr>
-          <p:cNvSpPr>
-            <a:spLocks noGrp="1"/>
-          </p:cNvSpPr>
-          <p:nvPr>
-            <p:ph idx="1"/>
-          </p:nvPr>
-        </p:nvSpPr>
-        <p:spPr/>
-        <p:txBody>
-          <a:bodyPr/>
-          <a:lstStyle/>
+            <a:endParaRPr lang="en-US" dirty="0"/>
+          </a:p>
+        </p:txBody>
+      </p:sp>
+      <p:sp>
+        <p:nvSpPr>
+          <p:cNvPr id="3" name="Text Placeholder 2"/>
+          <p:cNvSpPr>
+            <a:spLocks noGrp="1"/>
+          </p:cNvSpPr>
+          <p:nvPr>
+            <p:ph type="body" idx="1"/>
+          </p:nvPr>
+        </p:nvSpPr>
+        <p:spPr>
+          <a:xfrm>
+            <a:off x="1261872" y="4800600"/>
+            <a:ext cx="9418320" cy="1691640"/>
+          </a:xfrm>
+        </p:spPr>
+        <p:txBody>
+          <a:bodyPr anchor="t">
+            <a:normAutofit/>
+          </a:bodyPr>
+          <a:lstStyle>
+            <a:lvl1pPr marL="0" indent="0">
+              <a:buNone/>
+              <a:defRPr sz="2200">
+                <a:solidFill>
+                  <a:schemeClr val="tx1">
+                    <a:lumMod val="65000"/>
+                    <a:lumOff val="35000"/>
+                  </a:schemeClr>
+                </a:solidFill>
+              </a:defRPr>
+            </a:lvl1pPr>
+            <a:lvl2pPr marL="457200" indent="0">
+              <a:buNone/>
+              <a:defRPr sz="1800">
+                <a:solidFill>
+                  <a:schemeClr val="tx1">
+                    <a:tint val="75000"/>
+                  </a:schemeClr>
+                </a:solidFill>
+              </a:defRPr>
+            </a:lvl2pPr>
+            <a:lvl3pPr marL="914400" indent="0">
+              <a:buNone/>
+              <a:defRPr sz="1600">
+                <a:solidFill>
+                  <a:schemeClr val="tx1">
+                    <a:tint val="75000"/>
+                  </a:schemeClr>
+                </a:solidFill>
+              </a:defRPr>
+            </a:lvl3pPr>
+            <a:lvl4pPr marL="1371600" indent="0">
+              <a:buNone/>
+              <a:defRPr sz="1400">
+                <a:solidFill>
+                  <a:schemeClr val="tx1">
+                    <a:tint val="75000"/>
+                  </a:schemeClr>
+                </a:solidFill>
+              </a:defRPr>
+            </a:lvl4pPr>
+            <a:lvl5pPr marL="1828800" indent="0">
+              <a:buNone/>
+              <a:defRPr sz="1400">
+                <a:solidFill>
+                  <a:schemeClr val="tx1">
+                    <a:tint val="75000"/>
+                  </a:schemeClr>
+                </a:solidFill>
+              </a:defRPr>
+            </a:lvl5pPr>
+            <a:lvl6pPr marL="2286000" indent="0">
+              <a:buNone/>
+              <a:defRPr sz="1400">
+                <a:solidFill>
+                  <a:schemeClr val="tx1">
+                    <a:tint val="75000"/>
+                  </a:schemeClr>
+                </a:solidFill>
+              </a:defRPr>
+            </a:lvl6pPr>
+            <a:lvl7pPr marL="2743200" indent="0">
+              <a:buNone/>
+              <a:defRPr sz="1400">
+                <a:solidFill>
+                  <a:schemeClr val="tx1">
+                    <a:tint val="75000"/>
+                  </a:schemeClr>
+                </a:solidFill>
+              </a:defRPr>
+            </a:lvl7pPr>
+            <a:lvl8pPr marL="3200400" indent="0">
+              <a:buNone/>
+              <a:defRPr sz="1400">
+                <a:solidFill>
+                  <a:schemeClr val="tx1">
+                    <a:tint val="75000"/>
+                  </a:schemeClr>
+                </a:solidFill>
+              </a:defRPr>
+            </a:lvl8pPr>
+            <a:lvl9pPr marL="3657600" indent="0">
+              <a:buNone/>
+              <a:defRPr sz="1400">
+                <a:solidFill>
+                  <a:schemeClr val="tx1">
+                    <a:tint val="75000"/>
+                  </a:schemeClr>
+                </a:solidFill>
+              </a:defRPr>
+            </a:lvl9pPr>
+          </a:lstStyle>
           <a:p>
             <a:pPr lvl="0"/>
             <a:r>
@@ -443,41 +1096,1676 @@
               <a:t>Click to edit Master text styles</a:t>
             </a:r>
           </a:p>
-          <a:p>
-            <a:pPr lvl="1"/>
-            <a:r>
-              <a:rPr lang="en-US"/>
-              <a:t>Second level</a:t>
-            </a:r>
-          </a:p>
-          <a:p>
-            <a:pPr lvl="2"/>
-            <a:r>
-              <a:rPr lang="en-US"/>
-              <a:t>Third level</a:t>
-            </a:r>
-          </a:p>
-          <a:p>
-            <a:pPr lvl="3"/>
-            <a:r>
-              <a:rPr lang="en-US"/>
-              <a:t>Fourth level</a:t>
-            </a:r>
-          </a:p>
-          <a:p>
-            <a:pPr lvl="4"/>
-            <a:r>
-              <a:rPr lang="en-US"/>
-              <a:t>Fifth level</a:t>
-            </a:r>
-            <a:endParaRPr lang="en-GB"/>
-          </a:p>
-        </p:txBody>
+        </p:txBody>
+      </p:sp>
+      <p:sp>
+        <p:nvSpPr>
+          <p:cNvPr id="4" name="Date Placeholder 3"/>
+          <p:cNvSpPr>
+            <a:spLocks noGrp="1"/>
+          </p:cNvSpPr>
+          <p:nvPr>
+            <p:ph type="dt" sz="half" idx="10"/>
+          </p:nvPr>
+        </p:nvSpPr>
+        <p:spPr/>
+        <p:txBody>
+          <a:bodyPr/>
+          <a:lstStyle/>
+          <a:p>
+            <a:fld id="{908A7C6C-0F39-4D70-8E8D-FE5B9C95FA73}" type="datetimeFigureOut">
+              <a:rPr lang="en-US" dirty="0"/>
+              <a:t>6/5/2026</a:t>
+            </a:fld>
+            <a:endParaRPr lang="en-US" dirty="0"/>
+          </a:p>
+        </p:txBody>
+      </p:sp>
+      <p:sp>
+        <p:nvSpPr>
+          <p:cNvPr id="5" name="Footer Placeholder 4"/>
+          <p:cNvSpPr>
+            <a:spLocks noGrp="1"/>
+          </p:cNvSpPr>
+          <p:nvPr>
+            <p:ph type="ftr" sz="quarter" idx="11"/>
+          </p:nvPr>
+        </p:nvSpPr>
+        <p:spPr/>
+        <p:txBody>
+          <a:bodyPr/>
+          <a:lstStyle/>
+          <a:p>
+            <a:endParaRPr lang="en-US" dirty="0"/>
+          </a:p>
+        </p:txBody>
+      </p:sp>
+      <p:sp>
+        <p:nvSpPr>
+          <p:cNvPr id="6" name="Slide Number Placeholder 5"/>
+          <p:cNvSpPr>
+            <a:spLocks noGrp="1"/>
+          </p:cNvSpPr>
+          <p:nvPr>
+            <p:ph type="sldNum" sz="quarter" idx="12"/>
+          </p:nvPr>
+        </p:nvSpPr>
+        <p:spPr/>
+        <p:txBody>
+          <a:bodyPr/>
+          <a:lstStyle/>
+          <a:p>
+            <a:fld id="{4FAB73BC-B049-4115-A692-8D63A059BFB8}" type="slidenum">
+              <a:rPr lang="en-US" dirty="0"/>
+              <a:t>‹#›</a:t>
+            </a:fld>
+            <a:endParaRPr lang="en-US" dirty="0"/>
+          </a:p>
+        </p:txBody>
+      </p:sp>
+      <p:sp>
+        <p:nvSpPr>
+          <p:cNvPr id="7" name="Rectangle 6"/>
+          <p:cNvSpPr/>
+          <p:nvPr/>
+        </p:nvSpPr>
+        <p:spPr>
+          <a:xfrm>
+            <a:off x="0" y="0"/>
+            <a:ext cx="457200" cy="6858000"/>
+          </a:xfrm>
+          <a:prstGeom prst="rect">
+            <a:avLst/>
+          </a:prstGeom>
+          <a:solidFill>
+            <a:schemeClr val="accent1"/>
+          </a:solidFill>
+          <a:ln>
+            <a:noFill/>
+          </a:ln>
+        </p:spPr>
+        <p:style>
+          <a:lnRef idx="2">
+            <a:schemeClr val="accent1">
+              <a:shade val="50000"/>
+            </a:schemeClr>
+          </a:lnRef>
+          <a:fillRef idx="1">
+            <a:schemeClr val="accent1"/>
+          </a:fillRef>
+          <a:effectRef idx="0">
+            <a:schemeClr val="accent1"/>
+          </a:effectRef>
+          <a:fontRef idx="minor">
+            <a:schemeClr val="lt1"/>
+          </a:fontRef>
+        </p:style>
       </p:sp>
     </p:spTree>
     <p:extLst>
       <p:ext uri="{BB962C8B-B14F-4D97-AF65-F5344CB8AC3E}">
-        <p14:creationId xmlns:p14="http://schemas.microsoft.com/office/powerpoint/2010/main" val="2135793839"/>
+        <p14:creationId xmlns:p14="http://schemas.microsoft.com/office/powerpoint/2010/main" val="522722139"/>
+      </p:ext>
+    </p:extLst>
+  </p:cSld>
+  <p:clrMapOvr>
+    <a:masterClrMapping/>
+  </p:clrMapOvr>
+</p:sldLayout>
+</file>
+
+<file path=ppt/slideLayouts/slideLayout4.xml><?xml version="1.0" encoding="utf-8"?>
+<p:sldLayout xmlns:a="http://schemas.openxmlformats.org/drawingml/2006/main" xmlns:r="http://schemas.openxmlformats.org/officeDocument/2006/relationships" xmlns:p="http://schemas.openxmlformats.org/presentationml/2006/main" type="twoObj" preserve="1">
+  <p:cSld name="Two Content">
+    <p:spTree>
+      <p:nvGrpSpPr>
+        <p:cNvPr id="1" name=""/>
+        <p:cNvGrpSpPr/>
+        <p:nvPr/>
+      </p:nvGrpSpPr>
+      <p:grpSpPr>
+        <a:xfrm>
+          <a:off x="0" y="0"/>
+          <a:ext cx="0" cy="0"/>
+          <a:chOff x="0" y="0"/>
+          <a:chExt cx="0" cy="0"/>
+        </a:xfrm>
+      </p:grpSpPr>
+      <p:sp>
+        <p:nvSpPr>
+          <p:cNvPr id="2" name="Title 1"/>
+          <p:cNvSpPr>
+            <a:spLocks noGrp="1"/>
+          </p:cNvSpPr>
+          <p:nvPr>
+            <p:ph type="title"/>
+          </p:nvPr>
+        </p:nvSpPr>
+        <p:spPr/>
+        <p:txBody>
+          <a:bodyPr/>
+          <a:lstStyle/>
+          <a:p>
+            <a:r>
+              <a:rPr lang="en-US"/>
+              <a:t>Click to edit Master title style</a:t>
+            </a:r>
+            <a:endParaRPr lang="en-US" dirty="0"/>
+          </a:p>
+        </p:txBody>
+      </p:sp>
+      <p:sp>
+        <p:nvSpPr>
+          <p:cNvPr id="3" name="Content Placeholder 2"/>
+          <p:cNvSpPr>
+            <a:spLocks noGrp="1"/>
+          </p:cNvSpPr>
+          <p:nvPr>
+            <p:ph sz="half" idx="1"/>
+          </p:nvPr>
+        </p:nvSpPr>
+        <p:spPr>
+          <a:xfrm>
+            <a:off x="1261872" y="1828800"/>
+            <a:ext cx="4480560" cy="4351337"/>
+          </a:xfrm>
+        </p:spPr>
+        <p:txBody>
+          <a:bodyPr/>
+          <a:lstStyle>
+            <a:lvl1pPr>
+              <a:defRPr sz="1800"/>
+            </a:lvl1pPr>
+            <a:lvl2pPr>
+              <a:defRPr sz="1600"/>
+            </a:lvl2pPr>
+            <a:lvl3pPr>
+              <a:defRPr sz="1400"/>
+            </a:lvl3pPr>
+            <a:lvl4pPr>
+              <a:defRPr sz="1400"/>
+            </a:lvl4pPr>
+            <a:lvl5pPr>
+              <a:defRPr sz="1400"/>
+            </a:lvl5pPr>
+            <a:lvl6pPr>
+              <a:defRPr sz="1400"/>
+            </a:lvl6pPr>
+            <a:lvl7pPr>
+              <a:defRPr sz="1400"/>
+            </a:lvl7pPr>
+            <a:lvl8pPr>
+              <a:defRPr sz="1400"/>
+            </a:lvl8pPr>
+            <a:lvl9pPr>
+              <a:defRPr sz="1400"/>
+            </a:lvl9pPr>
+          </a:lstStyle>
+          <a:p>
+            <a:pPr lvl="0"/>
+            <a:r>
+              <a:rPr lang="en-US"/>
+              <a:t>Click to edit Master text styles</a:t>
+            </a:r>
+          </a:p>
+          <a:p>
+            <a:pPr lvl="1"/>
+            <a:r>
+              <a:rPr lang="en-US"/>
+              <a:t>Second level</a:t>
+            </a:r>
+          </a:p>
+          <a:p>
+            <a:pPr lvl="2"/>
+            <a:r>
+              <a:rPr lang="en-US"/>
+              <a:t>Third level</a:t>
+            </a:r>
+          </a:p>
+          <a:p>
+            <a:pPr lvl="3"/>
+            <a:r>
+              <a:rPr lang="en-US"/>
+              <a:t>Fourth level</a:t>
+            </a:r>
+          </a:p>
+          <a:p>
+            <a:pPr lvl="4"/>
+            <a:r>
+              <a:rPr lang="en-US"/>
+              <a:t>Fifth level</a:t>
+            </a:r>
+            <a:endParaRPr lang="en-US" dirty="0"/>
+          </a:p>
+        </p:txBody>
+      </p:sp>
+      <p:sp>
+        <p:nvSpPr>
+          <p:cNvPr id="4" name="Content Placeholder 3"/>
+          <p:cNvSpPr>
+            <a:spLocks noGrp="1"/>
+          </p:cNvSpPr>
+          <p:nvPr>
+            <p:ph sz="half" idx="2"/>
+          </p:nvPr>
+        </p:nvSpPr>
+        <p:spPr>
+          <a:xfrm>
+            <a:off x="6126480" y="1828800"/>
+            <a:ext cx="4480560" cy="4351337"/>
+          </a:xfrm>
+        </p:spPr>
+        <p:txBody>
+          <a:bodyPr/>
+          <a:lstStyle>
+            <a:lvl1pPr>
+              <a:defRPr sz="1800"/>
+            </a:lvl1pPr>
+            <a:lvl2pPr>
+              <a:defRPr sz="1600"/>
+            </a:lvl2pPr>
+            <a:lvl3pPr>
+              <a:defRPr sz="1400"/>
+            </a:lvl3pPr>
+            <a:lvl4pPr>
+              <a:defRPr sz="1400"/>
+            </a:lvl4pPr>
+            <a:lvl5pPr>
+              <a:defRPr sz="1400"/>
+            </a:lvl5pPr>
+            <a:lvl6pPr>
+              <a:defRPr sz="1400"/>
+            </a:lvl6pPr>
+            <a:lvl7pPr>
+              <a:defRPr sz="1400"/>
+            </a:lvl7pPr>
+            <a:lvl8pPr>
+              <a:defRPr sz="1400"/>
+            </a:lvl8pPr>
+            <a:lvl9pPr>
+              <a:defRPr sz="1400"/>
+            </a:lvl9pPr>
+          </a:lstStyle>
+          <a:p>
+            <a:pPr lvl="0"/>
+            <a:r>
+              <a:rPr lang="en-US"/>
+              <a:t>Click to edit Master text styles</a:t>
+            </a:r>
+          </a:p>
+          <a:p>
+            <a:pPr lvl="1"/>
+            <a:r>
+              <a:rPr lang="en-US"/>
+              <a:t>Second level</a:t>
+            </a:r>
+          </a:p>
+          <a:p>
+            <a:pPr lvl="2"/>
+            <a:r>
+              <a:rPr lang="en-US"/>
+              <a:t>Third level</a:t>
+            </a:r>
+          </a:p>
+          <a:p>
+            <a:pPr lvl="3"/>
+            <a:r>
+              <a:rPr lang="en-US"/>
+              <a:t>Fourth level</a:t>
+            </a:r>
+          </a:p>
+          <a:p>
+            <a:pPr lvl="4"/>
+            <a:r>
+              <a:rPr lang="en-US"/>
+              <a:t>Fifth level</a:t>
+            </a:r>
+            <a:endParaRPr lang="en-US" dirty="0"/>
+          </a:p>
+        </p:txBody>
+      </p:sp>
+      <p:sp>
+        <p:nvSpPr>
+          <p:cNvPr id="5" name="Date Placeholder 4"/>
+          <p:cNvSpPr>
+            <a:spLocks noGrp="1"/>
+          </p:cNvSpPr>
+          <p:nvPr>
+            <p:ph type="dt" sz="half" idx="10"/>
+          </p:nvPr>
+        </p:nvSpPr>
+        <p:spPr/>
+        <p:txBody>
+          <a:bodyPr/>
+          <a:lstStyle/>
+          <a:p>
+            <a:fld id="{DFCFA4AC-08CC-42CE-BD01-C191750A04EC}" type="datetimeFigureOut">
+              <a:rPr lang="en-US" dirty="0"/>
+              <a:t>6/5/2026</a:t>
+            </a:fld>
+            <a:endParaRPr lang="en-US" dirty="0"/>
+          </a:p>
+        </p:txBody>
+      </p:sp>
+      <p:sp>
+        <p:nvSpPr>
+          <p:cNvPr id="6" name="Footer Placeholder 5"/>
+          <p:cNvSpPr>
+            <a:spLocks noGrp="1"/>
+          </p:cNvSpPr>
+          <p:nvPr>
+            <p:ph type="ftr" sz="quarter" idx="11"/>
+          </p:nvPr>
+        </p:nvSpPr>
+        <p:spPr/>
+        <p:txBody>
+          <a:bodyPr/>
+          <a:lstStyle/>
+          <a:p>
+            <a:endParaRPr lang="en-US" dirty="0"/>
+          </a:p>
+        </p:txBody>
+      </p:sp>
+      <p:sp>
+        <p:nvSpPr>
+          <p:cNvPr id="7" name="Slide Number Placeholder 6"/>
+          <p:cNvSpPr>
+            <a:spLocks noGrp="1"/>
+          </p:cNvSpPr>
+          <p:nvPr>
+            <p:ph type="sldNum" sz="quarter" idx="12"/>
+          </p:nvPr>
+        </p:nvSpPr>
+        <p:spPr/>
+        <p:txBody>
+          <a:bodyPr/>
+          <a:lstStyle/>
+          <a:p>
+            <a:fld id="{4FAB73BC-B049-4115-A692-8D63A059BFB8}" type="slidenum">
+              <a:rPr lang="en-US" dirty="0"/>
+              <a:t>‹#›</a:t>
+            </a:fld>
+            <a:endParaRPr lang="en-US" dirty="0"/>
+          </a:p>
+        </p:txBody>
+      </p:sp>
+    </p:spTree>
+    <p:extLst>
+      <p:ext uri="{BB962C8B-B14F-4D97-AF65-F5344CB8AC3E}">
+        <p14:creationId xmlns:p14="http://schemas.microsoft.com/office/powerpoint/2010/main" val="1569380403"/>
+      </p:ext>
+    </p:extLst>
+  </p:cSld>
+  <p:clrMapOvr>
+    <a:masterClrMapping/>
+  </p:clrMapOvr>
+</p:sldLayout>
+</file>
+
+<file path=ppt/slideLayouts/slideLayout5.xml><?xml version="1.0" encoding="utf-8"?>
+<p:sldLayout xmlns:a="http://schemas.openxmlformats.org/drawingml/2006/main" xmlns:r="http://schemas.openxmlformats.org/officeDocument/2006/relationships" xmlns:p="http://schemas.openxmlformats.org/presentationml/2006/main" type="twoTxTwoObj" preserve="1">
+  <p:cSld name="Comparison">
+    <p:spTree>
+      <p:nvGrpSpPr>
+        <p:cNvPr id="1" name=""/>
+        <p:cNvGrpSpPr/>
+        <p:nvPr/>
+      </p:nvGrpSpPr>
+      <p:grpSpPr>
+        <a:xfrm>
+          <a:off x="0" y="0"/>
+          <a:ext cx="0" cy="0"/>
+          <a:chOff x="0" y="0"/>
+          <a:chExt cx="0" cy="0"/>
+        </a:xfrm>
+      </p:grpSpPr>
+      <p:sp>
+        <p:nvSpPr>
+          <p:cNvPr id="10" name="Title 9"/>
+          <p:cNvSpPr>
+            <a:spLocks noGrp="1"/>
+          </p:cNvSpPr>
+          <p:nvPr>
+            <p:ph type="title"/>
+          </p:nvPr>
+        </p:nvSpPr>
+        <p:spPr/>
+        <p:txBody>
+          <a:bodyPr/>
+          <a:lstStyle/>
+          <a:p>
+            <a:r>
+              <a:rPr lang="en-US"/>
+              <a:t>Click to edit Master title style</a:t>
+            </a:r>
+            <a:endParaRPr lang="en-US" dirty="0"/>
+          </a:p>
+        </p:txBody>
+      </p:sp>
+      <p:sp>
+        <p:nvSpPr>
+          <p:cNvPr id="3" name="Text Placeholder 2"/>
+          <p:cNvSpPr>
+            <a:spLocks noGrp="1"/>
+          </p:cNvSpPr>
+          <p:nvPr>
+            <p:ph type="body" idx="1"/>
+          </p:nvPr>
+        </p:nvSpPr>
+        <p:spPr>
+          <a:xfrm>
+            <a:off x="1261872" y="1713655"/>
+            <a:ext cx="4480560" cy="731520"/>
+          </a:xfrm>
+        </p:spPr>
+        <p:txBody>
+          <a:bodyPr anchor="b">
+            <a:normAutofit/>
+          </a:bodyPr>
+          <a:lstStyle>
+            <a:lvl1pPr marL="0" indent="0">
+              <a:spcBef>
+                <a:spcPts val="0"/>
+              </a:spcBef>
+              <a:buNone/>
+              <a:defRPr sz="2000" b="0">
+                <a:solidFill>
+                  <a:schemeClr val="tx2"/>
+                </a:solidFill>
+              </a:defRPr>
+            </a:lvl1pPr>
+            <a:lvl2pPr marL="457200" indent="0">
+              <a:buNone/>
+              <a:defRPr sz="2000" b="1"/>
+            </a:lvl2pPr>
+            <a:lvl3pPr marL="914400" indent="0">
+              <a:buNone/>
+              <a:defRPr sz="1800" b="1"/>
+            </a:lvl3pPr>
+            <a:lvl4pPr marL="1371600" indent="0">
+              <a:buNone/>
+              <a:defRPr sz="1600" b="1"/>
+            </a:lvl4pPr>
+            <a:lvl5pPr marL="1828800" indent="0">
+              <a:buNone/>
+              <a:defRPr sz="1600" b="1"/>
+            </a:lvl5pPr>
+            <a:lvl6pPr marL="2286000" indent="0">
+              <a:buNone/>
+              <a:defRPr sz="1600" b="1"/>
+            </a:lvl6pPr>
+            <a:lvl7pPr marL="2743200" indent="0">
+              <a:buNone/>
+              <a:defRPr sz="1600" b="1"/>
+            </a:lvl7pPr>
+            <a:lvl8pPr marL="3200400" indent="0">
+              <a:buNone/>
+              <a:defRPr sz="1600" b="1"/>
+            </a:lvl8pPr>
+            <a:lvl9pPr marL="3657600" indent="0">
+              <a:buNone/>
+              <a:defRPr sz="1600" b="1"/>
+            </a:lvl9pPr>
+          </a:lstStyle>
+          <a:p>
+            <a:pPr lvl="0"/>
+            <a:r>
+              <a:rPr lang="en-US"/>
+              <a:t>Click to edit Master text styles</a:t>
+            </a:r>
+          </a:p>
+        </p:txBody>
+      </p:sp>
+      <p:sp>
+        <p:nvSpPr>
+          <p:cNvPr id="4" name="Content Placeholder 3"/>
+          <p:cNvSpPr>
+            <a:spLocks noGrp="1"/>
+          </p:cNvSpPr>
+          <p:nvPr>
+            <p:ph sz="half" idx="2"/>
+          </p:nvPr>
+        </p:nvSpPr>
+        <p:spPr>
+          <a:xfrm>
+            <a:off x="1261872" y="2507550"/>
+            <a:ext cx="4480560" cy="3664650"/>
+          </a:xfrm>
+        </p:spPr>
+        <p:txBody>
+          <a:bodyPr/>
+          <a:lstStyle>
+            <a:lvl1pPr>
+              <a:defRPr sz="1800"/>
+            </a:lvl1pPr>
+            <a:lvl2pPr>
+              <a:defRPr sz="1600"/>
+            </a:lvl2pPr>
+            <a:lvl3pPr>
+              <a:defRPr sz="1400"/>
+            </a:lvl3pPr>
+            <a:lvl4pPr>
+              <a:defRPr sz="1400"/>
+            </a:lvl4pPr>
+            <a:lvl5pPr>
+              <a:defRPr sz="1400"/>
+            </a:lvl5pPr>
+            <a:lvl6pPr>
+              <a:defRPr sz="1400"/>
+            </a:lvl6pPr>
+            <a:lvl7pPr>
+              <a:defRPr sz="1400"/>
+            </a:lvl7pPr>
+            <a:lvl8pPr>
+              <a:defRPr sz="1400"/>
+            </a:lvl8pPr>
+            <a:lvl9pPr>
+              <a:defRPr sz="1400"/>
+            </a:lvl9pPr>
+          </a:lstStyle>
+          <a:p>
+            <a:pPr lvl="0"/>
+            <a:r>
+              <a:rPr lang="en-US"/>
+              <a:t>Click to edit Master text styles</a:t>
+            </a:r>
+          </a:p>
+          <a:p>
+            <a:pPr lvl="1"/>
+            <a:r>
+              <a:rPr lang="en-US"/>
+              <a:t>Second level</a:t>
+            </a:r>
+          </a:p>
+          <a:p>
+            <a:pPr lvl="2"/>
+            <a:r>
+              <a:rPr lang="en-US"/>
+              <a:t>Third level</a:t>
+            </a:r>
+          </a:p>
+          <a:p>
+            <a:pPr lvl="3"/>
+            <a:r>
+              <a:rPr lang="en-US"/>
+              <a:t>Fourth level</a:t>
+            </a:r>
+          </a:p>
+          <a:p>
+            <a:pPr lvl="4"/>
+            <a:r>
+              <a:rPr lang="en-US"/>
+              <a:t>Fifth level</a:t>
+            </a:r>
+            <a:endParaRPr lang="en-US" dirty="0"/>
+          </a:p>
+        </p:txBody>
+      </p:sp>
+      <p:sp>
+        <p:nvSpPr>
+          <p:cNvPr id="5" name="Text Placeholder 4"/>
+          <p:cNvSpPr>
+            <a:spLocks noGrp="1"/>
+          </p:cNvSpPr>
+          <p:nvPr>
+            <p:ph type="body" sz="quarter" idx="3"/>
+          </p:nvPr>
+        </p:nvSpPr>
+        <p:spPr>
+          <a:xfrm>
+            <a:off x="6126480" y="1713655"/>
+            <a:ext cx="4480560" cy="731520"/>
+          </a:xfrm>
+        </p:spPr>
+        <p:txBody>
+          <a:bodyPr anchor="b">
+            <a:normAutofit/>
+          </a:bodyPr>
+          <a:lstStyle>
+            <a:lvl1pPr marL="0" indent="0">
+              <a:lnSpc>
+                <a:spcPct val="95000"/>
+              </a:lnSpc>
+              <a:spcBef>
+                <a:spcPts val="0"/>
+              </a:spcBef>
+              <a:buNone/>
+              <a:defRPr lang="en-US" sz="2000" b="0" kern="1200" dirty="0">
+                <a:solidFill>
+                  <a:schemeClr val="tx2"/>
+                </a:solidFill>
+                <a:latin typeface="+mn-lt"/>
+                <a:ea typeface="+mn-ea"/>
+                <a:cs typeface="+mn-cs"/>
+              </a:defRPr>
+            </a:lvl1pPr>
+            <a:lvl2pPr marL="457200" indent="0">
+              <a:buNone/>
+              <a:defRPr sz="2000" b="1"/>
+            </a:lvl2pPr>
+            <a:lvl3pPr marL="914400" indent="0">
+              <a:buNone/>
+              <a:defRPr sz="1800" b="1"/>
+            </a:lvl3pPr>
+            <a:lvl4pPr marL="1371600" indent="0">
+              <a:buNone/>
+              <a:defRPr sz="1600" b="1"/>
+            </a:lvl4pPr>
+            <a:lvl5pPr marL="1828800" indent="0">
+              <a:buNone/>
+              <a:defRPr sz="1600" b="1"/>
+            </a:lvl5pPr>
+            <a:lvl6pPr marL="2286000" indent="0">
+              <a:buNone/>
+              <a:defRPr sz="1600" b="1"/>
+            </a:lvl6pPr>
+            <a:lvl7pPr marL="2743200" indent="0">
+              <a:buNone/>
+              <a:defRPr sz="1600" b="1"/>
+            </a:lvl7pPr>
+            <a:lvl8pPr marL="3200400" indent="0">
+              <a:buNone/>
+              <a:defRPr sz="1600" b="1"/>
+            </a:lvl8pPr>
+            <a:lvl9pPr marL="3657600" indent="0">
+              <a:buNone/>
+              <a:defRPr sz="1600" b="1"/>
+            </a:lvl9pPr>
+          </a:lstStyle>
+          <a:p>
+            <a:pPr marL="0" lvl="0" indent="0" algn="l" defTabSz="914400" rtl="0" eaLnBrk="1" latinLnBrk="0" hangingPunct="1">
+              <a:lnSpc>
+                <a:spcPct val="90000"/>
+              </a:lnSpc>
+              <a:spcBef>
+                <a:spcPts val="2000"/>
+              </a:spcBef>
+              <a:buFontTx/>
+              <a:buNone/>
+            </a:pPr>
+            <a:r>
+              <a:rPr lang="en-US"/>
+              <a:t>Click to edit Master text styles</a:t>
+            </a:r>
+          </a:p>
+        </p:txBody>
+      </p:sp>
+      <p:sp>
+        <p:nvSpPr>
+          <p:cNvPr id="6" name="Content Placeholder 5"/>
+          <p:cNvSpPr>
+            <a:spLocks noGrp="1"/>
+          </p:cNvSpPr>
+          <p:nvPr>
+            <p:ph sz="quarter" idx="4"/>
+          </p:nvPr>
+        </p:nvSpPr>
+        <p:spPr>
+          <a:xfrm>
+            <a:off x="6126480" y="2507550"/>
+            <a:ext cx="4480560" cy="3664650"/>
+          </a:xfrm>
+        </p:spPr>
+        <p:txBody>
+          <a:bodyPr/>
+          <a:lstStyle>
+            <a:lvl1pPr>
+              <a:defRPr sz="1800"/>
+            </a:lvl1pPr>
+            <a:lvl2pPr>
+              <a:defRPr sz="1600"/>
+            </a:lvl2pPr>
+            <a:lvl3pPr>
+              <a:defRPr sz="1400"/>
+            </a:lvl3pPr>
+            <a:lvl4pPr>
+              <a:defRPr sz="1400"/>
+            </a:lvl4pPr>
+            <a:lvl5pPr>
+              <a:defRPr sz="1400"/>
+            </a:lvl5pPr>
+            <a:lvl6pPr>
+              <a:defRPr sz="1400"/>
+            </a:lvl6pPr>
+            <a:lvl7pPr>
+              <a:defRPr sz="1400"/>
+            </a:lvl7pPr>
+            <a:lvl8pPr>
+              <a:defRPr sz="1400"/>
+            </a:lvl8pPr>
+            <a:lvl9pPr>
+              <a:defRPr sz="1400"/>
+            </a:lvl9pPr>
+          </a:lstStyle>
+          <a:p>
+            <a:pPr lvl="0"/>
+            <a:r>
+              <a:rPr lang="en-US"/>
+              <a:t>Click to edit Master text styles</a:t>
+            </a:r>
+          </a:p>
+          <a:p>
+            <a:pPr lvl="1"/>
+            <a:r>
+              <a:rPr lang="en-US"/>
+              <a:t>Second level</a:t>
+            </a:r>
+          </a:p>
+          <a:p>
+            <a:pPr lvl="2"/>
+            <a:r>
+              <a:rPr lang="en-US"/>
+              <a:t>Third level</a:t>
+            </a:r>
+          </a:p>
+          <a:p>
+            <a:pPr lvl="3"/>
+            <a:r>
+              <a:rPr lang="en-US"/>
+              <a:t>Fourth level</a:t>
+            </a:r>
+          </a:p>
+          <a:p>
+            <a:pPr lvl="4"/>
+            <a:r>
+              <a:rPr lang="en-US"/>
+              <a:t>Fifth level</a:t>
+            </a:r>
+            <a:endParaRPr lang="en-US" dirty="0"/>
+          </a:p>
+        </p:txBody>
+      </p:sp>
+      <p:sp>
+        <p:nvSpPr>
+          <p:cNvPr id="7" name="Date Placeholder 6"/>
+          <p:cNvSpPr>
+            <a:spLocks noGrp="1"/>
+          </p:cNvSpPr>
+          <p:nvPr>
+            <p:ph type="dt" sz="half" idx="10"/>
+          </p:nvPr>
+        </p:nvSpPr>
+        <p:spPr/>
+        <p:txBody>
+          <a:bodyPr/>
+          <a:lstStyle/>
+          <a:p>
+            <a:fld id="{1BA7A723-92A7-435B-B681-F25B092FEFEB}" type="datetimeFigureOut">
+              <a:rPr lang="en-US" dirty="0"/>
+              <a:t>6/5/2026</a:t>
+            </a:fld>
+            <a:endParaRPr lang="en-US" dirty="0"/>
+          </a:p>
+        </p:txBody>
+      </p:sp>
+      <p:sp>
+        <p:nvSpPr>
+          <p:cNvPr id="8" name="Footer Placeholder 7"/>
+          <p:cNvSpPr>
+            <a:spLocks noGrp="1"/>
+          </p:cNvSpPr>
+          <p:nvPr>
+            <p:ph type="ftr" sz="quarter" idx="11"/>
+          </p:nvPr>
+        </p:nvSpPr>
+        <p:spPr/>
+        <p:txBody>
+          <a:bodyPr/>
+          <a:lstStyle/>
+          <a:p>
+            <a:endParaRPr lang="en-US" dirty="0"/>
+          </a:p>
+        </p:txBody>
+      </p:sp>
+      <p:sp>
+        <p:nvSpPr>
+          <p:cNvPr id="9" name="Slide Number Placeholder 8"/>
+          <p:cNvSpPr>
+            <a:spLocks noGrp="1"/>
+          </p:cNvSpPr>
+          <p:nvPr>
+            <p:ph type="sldNum" sz="quarter" idx="12"/>
+          </p:nvPr>
+        </p:nvSpPr>
+        <p:spPr/>
+        <p:txBody>
+          <a:bodyPr/>
+          <a:lstStyle/>
+          <a:p>
+            <a:fld id="{4FAB73BC-B049-4115-A692-8D63A059BFB8}" type="slidenum">
+              <a:rPr lang="en-US" dirty="0"/>
+              <a:t>‹#›</a:t>
+            </a:fld>
+            <a:endParaRPr lang="en-US" dirty="0"/>
+          </a:p>
+        </p:txBody>
+      </p:sp>
+    </p:spTree>
+    <p:extLst>
+      <p:ext uri="{BB962C8B-B14F-4D97-AF65-F5344CB8AC3E}">
+        <p14:creationId xmlns:p14="http://schemas.microsoft.com/office/powerpoint/2010/main" val="2901563662"/>
+      </p:ext>
+    </p:extLst>
+  </p:cSld>
+  <p:clrMapOvr>
+    <a:masterClrMapping/>
+  </p:clrMapOvr>
+</p:sldLayout>
+</file>
+
+<file path=ppt/slideLayouts/slideLayout6.xml><?xml version="1.0" encoding="utf-8"?>
+<p:sldLayout xmlns:a="http://schemas.openxmlformats.org/drawingml/2006/main" xmlns:r="http://schemas.openxmlformats.org/officeDocument/2006/relationships" xmlns:p="http://schemas.openxmlformats.org/presentationml/2006/main" type="titleOnly" preserve="1">
+  <p:cSld name="Title Only">
+    <p:spTree>
+      <p:nvGrpSpPr>
+        <p:cNvPr id="1" name=""/>
+        <p:cNvGrpSpPr/>
+        <p:nvPr/>
+      </p:nvGrpSpPr>
+      <p:grpSpPr>
+        <a:xfrm>
+          <a:off x="0" y="0"/>
+          <a:ext cx="0" cy="0"/>
+          <a:chOff x="0" y="0"/>
+          <a:chExt cx="0" cy="0"/>
+        </a:xfrm>
+      </p:grpSpPr>
+      <p:sp>
+        <p:nvSpPr>
+          <p:cNvPr id="6" name="Title 5"/>
+          <p:cNvSpPr>
+            <a:spLocks noGrp="1"/>
+          </p:cNvSpPr>
+          <p:nvPr>
+            <p:ph type="title"/>
+          </p:nvPr>
+        </p:nvSpPr>
+        <p:spPr/>
+        <p:txBody>
+          <a:bodyPr/>
+          <a:lstStyle/>
+          <a:p>
+            <a:r>
+              <a:rPr lang="en-US"/>
+              <a:t>Click to edit Master title style</a:t>
+            </a:r>
+            <a:endParaRPr lang="en-US" dirty="0"/>
+          </a:p>
+        </p:txBody>
+      </p:sp>
+      <p:sp>
+        <p:nvSpPr>
+          <p:cNvPr id="3" name="Date Placeholder 2"/>
+          <p:cNvSpPr>
+            <a:spLocks noGrp="1"/>
+          </p:cNvSpPr>
+          <p:nvPr>
+            <p:ph type="dt" sz="half" idx="10"/>
+          </p:nvPr>
+        </p:nvSpPr>
+        <p:spPr/>
+        <p:txBody>
+          <a:bodyPr/>
+          <a:lstStyle/>
+          <a:p>
+            <a:fld id="{4F170639-886C-4FCF-9EAB-ABB5DA3F3F4A}" type="datetimeFigureOut">
+              <a:rPr lang="en-US" dirty="0"/>
+              <a:t>6/5/2026</a:t>
+            </a:fld>
+            <a:endParaRPr lang="en-US" dirty="0"/>
+          </a:p>
+        </p:txBody>
+      </p:sp>
+      <p:sp>
+        <p:nvSpPr>
+          <p:cNvPr id="4" name="Footer Placeholder 3"/>
+          <p:cNvSpPr>
+            <a:spLocks noGrp="1"/>
+          </p:cNvSpPr>
+          <p:nvPr>
+            <p:ph type="ftr" sz="quarter" idx="11"/>
+          </p:nvPr>
+        </p:nvSpPr>
+        <p:spPr/>
+        <p:txBody>
+          <a:bodyPr/>
+          <a:lstStyle/>
+          <a:p>
+            <a:endParaRPr lang="en-US" dirty="0"/>
+          </a:p>
+        </p:txBody>
+      </p:sp>
+      <p:sp>
+        <p:nvSpPr>
+          <p:cNvPr id="5" name="Slide Number Placeholder 4"/>
+          <p:cNvSpPr>
+            <a:spLocks noGrp="1"/>
+          </p:cNvSpPr>
+          <p:nvPr>
+            <p:ph type="sldNum" sz="quarter" idx="12"/>
+          </p:nvPr>
+        </p:nvSpPr>
+        <p:spPr/>
+        <p:txBody>
+          <a:bodyPr/>
+          <a:lstStyle/>
+          <a:p>
+            <a:fld id="{4FAB73BC-B049-4115-A692-8D63A059BFB8}" type="slidenum">
+              <a:rPr lang="en-US" dirty="0"/>
+              <a:t>‹#›</a:t>
+            </a:fld>
+            <a:endParaRPr lang="en-US" dirty="0"/>
+          </a:p>
+        </p:txBody>
+      </p:sp>
+    </p:spTree>
+    <p:extLst>
+      <p:ext uri="{BB962C8B-B14F-4D97-AF65-F5344CB8AC3E}">
+        <p14:creationId xmlns:p14="http://schemas.microsoft.com/office/powerpoint/2010/main" val="4026767299"/>
+      </p:ext>
+    </p:extLst>
+  </p:cSld>
+  <p:clrMapOvr>
+    <a:masterClrMapping/>
+  </p:clrMapOvr>
+</p:sldLayout>
+</file>
+
+<file path=ppt/slideLayouts/slideLayout7.xml><?xml version="1.0" encoding="utf-8"?>
+<p:sldLayout xmlns:a="http://schemas.openxmlformats.org/drawingml/2006/main" xmlns:r="http://schemas.openxmlformats.org/officeDocument/2006/relationships" xmlns:p="http://schemas.openxmlformats.org/presentationml/2006/main" type="blank" preserve="1">
+  <p:cSld name="Blank">
+    <p:spTree>
+      <p:nvGrpSpPr>
+        <p:cNvPr id="1" name=""/>
+        <p:cNvGrpSpPr/>
+        <p:nvPr/>
+      </p:nvGrpSpPr>
+      <p:grpSpPr>
+        <a:xfrm>
+          <a:off x="0" y="0"/>
+          <a:ext cx="0" cy="0"/>
+          <a:chOff x="0" y="0"/>
+          <a:chExt cx="0" cy="0"/>
+        </a:xfrm>
+      </p:grpSpPr>
+      <p:sp>
+        <p:nvSpPr>
+          <p:cNvPr id="2" name="Date Placeholder 1"/>
+          <p:cNvSpPr>
+            <a:spLocks noGrp="1"/>
+          </p:cNvSpPr>
+          <p:nvPr>
+            <p:ph type="dt" sz="half" idx="10"/>
+          </p:nvPr>
+        </p:nvSpPr>
+        <p:spPr/>
+        <p:txBody>
+          <a:bodyPr/>
+          <a:lstStyle/>
+          <a:p>
+            <a:fld id="{22230651-31F4-45D2-98AE-A2108F41BC07}" type="datetimeFigureOut">
+              <a:rPr lang="en-US" dirty="0"/>
+              <a:t>6/5/2026</a:t>
+            </a:fld>
+            <a:endParaRPr lang="en-US" dirty="0"/>
+          </a:p>
+        </p:txBody>
+      </p:sp>
+      <p:sp>
+        <p:nvSpPr>
+          <p:cNvPr id="3" name="Footer Placeholder 2"/>
+          <p:cNvSpPr>
+            <a:spLocks noGrp="1"/>
+          </p:cNvSpPr>
+          <p:nvPr>
+            <p:ph type="ftr" sz="quarter" idx="11"/>
+          </p:nvPr>
+        </p:nvSpPr>
+        <p:spPr/>
+        <p:txBody>
+          <a:bodyPr/>
+          <a:lstStyle/>
+          <a:p>
+            <a:endParaRPr lang="en-US" dirty="0"/>
+          </a:p>
+        </p:txBody>
+      </p:sp>
+      <p:sp>
+        <p:nvSpPr>
+          <p:cNvPr id="4" name="Slide Number Placeholder 3"/>
+          <p:cNvSpPr>
+            <a:spLocks noGrp="1"/>
+          </p:cNvSpPr>
+          <p:nvPr>
+            <p:ph type="sldNum" sz="quarter" idx="12"/>
+          </p:nvPr>
+        </p:nvSpPr>
+        <p:spPr/>
+        <p:txBody>
+          <a:bodyPr/>
+          <a:lstStyle/>
+          <a:p>
+            <a:fld id="{4FAB73BC-B049-4115-A692-8D63A059BFB8}" type="slidenum">
+              <a:rPr lang="en-US" dirty="0"/>
+              <a:t>‹#›</a:t>
+            </a:fld>
+            <a:endParaRPr lang="en-US" dirty="0"/>
+          </a:p>
+        </p:txBody>
+      </p:sp>
+    </p:spTree>
+    <p:extLst>
+      <p:ext uri="{BB962C8B-B14F-4D97-AF65-F5344CB8AC3E}">
+        <p14:creationId xmlns:p14="http://schemas.microsoft.com/office/powerpoint/2010/main" val="159623885"/>
+      </p:ext>
+    </p:extLst>
+  </p:cSld>
+  <p:clrMapOvr>
+    <a:masterClrMapping/>
+  </p:clrMapOvr>
+</p:sldLayout>
+</file>
+
+<file path=ppt/slideLayouts/slideLayout8.xml><?xml version="1.0" encoding="utf-8"?>
+<p:sldLayout xmlns:a="http://schemas.openxmlformats.org/drawingml/2006/main" xmlns:r="http://schemas.openxmlformats.org/officeDocument/2006/relationships" xmlns:p="http://schemas.openxmlformats.org/presentationml/2006/main" type="objTx" preserve="1">
+  <p:cSld name="Content with Caption">
+    <p:spTree>
+      <p:nvGrpSpPr>
+        <p:cNvPr id="1" name=""/>
+        <p:cNvGrpSpPr/>
+        <p:nvPr/>
+      </p:nvGrpSpPr>
+      <p:grpSpPr>
+        <a:xfrm>
+          <a:off x="0" y="0"/>
+          <a:ext cx="0" cy="0"/>
+          <a:chOff x="0" y="0"/>
+          <a:chExt cx="0" cy="0"/>
+        </a:xfrm>
+      </p:grpSpPr>
+      <p:sp>
+        <p:nvSpPr>
+          <p:cNvPr id="2" name="Title 1"/>
+          <p:cNvSpPr>
+            <a:spLocks noGrp="1"/>
+          </p:cNvSpPr>
+          <p:nvPr>
+            <p:ph type="title"/>
+          </p:nvPr>
+        </p:nvSpPr>
+        <p:spPr>
+          <a:xfrm>
+            <a:off x="841248" y="457200"/>
+            <a:ext cx="3200400" cy="1600197"/>
+          </a:xfrm>
+        </p:spPr>
+        <p:txBody>
+          <a:bodyPr anchor="b">
+            <a:normAutofit/>
+          </a:bodyPr>
+          <a:lstStyle>
+            <a:lvl1pPr>
+              <a:defRPr sz="3200" b="0" baseline="0"/>
+            </a:lvl1pPr>
+          </a:lstStyle>
+          <a:p>
+            <a:r>
+              <a:rPr lang="en-US"/>
+              <a:t>Click to edit Master title style</a:t>
+            </a:r>
+            <a:endParaRPr lang="en-US" dirty="0"/>
+          </a:p>
+        </p:txBody>
+      </p:sp>
+      <p:sp>
+        <p:nvSpPr>
+          <p:cNvPr id="3" name="Content Placeholder 2"/>
+          <p:cNvSpPr>
+            <a:spLocks noGrp="1"/>
+          </p:cNvSpPr>
+          <p:nvPr>
+            <p:ph idx="1"/>
+          </p:nvPr>
+        </p:nvSpPr>
+        <p:spPr>
+          <a:xfrm>
+            <a:off x="4504267" y="685800"/>
+            <a:ext cx="6079066" cy="5486400"/>
+          </a:xfrm>
+        </p:spPr>
+        <p:txBody>
+          <a:bodyPr/>
+          <a:lstStyle>
+            <a:lvl1pPr>
+              <a:defRPr sz="2000"/>
+            </a:lvl1pPr>
+            <a:lvl2pPr>
+              <a:defRPr sz="1800"/>
+            </a:lvl2pPr>
+            <a:lvl3pPr>
+              <a:defRPr sz="1600"/>
+            </a:lvl3pPr>
+            <a:lvl4pPr>
+              <a:defRPr sz="1400"/>
+            </a:lvl4pPr>
+            <a:lvl5pPr>
+              <a:defRPr sz="1400"/>
+            </a:lvl5pPr>
+            <a:lvl6pPr>
+              <a:defRPr sz="1400"/>
+            </a:lvl6pPr>
+            <a:lvl7pPr>
+              <a:defRPr sz="1400"/>
+            </a:lvl7pPr>
+            <a:lvl8pPr>
+              <a:defRPr sz="1400"/>
+            </a:lvl8pPr>
+            <a:lvl9pPr>
+              <a:defRPr sz="1400"/>
+            </a:lvl9pPr>
+          </a:lstStyle>
+          <a:p>
+            <a:pPr lvl="0"/>
+            <a:r>
+              <a:rPr lang="en-US"/>
+              <a:t>Click to edit Master text styles</a:t>
+            </a:r>
+          </a:p>
+          <a:p>
+            <a:pPr lvl="1"/>
+            <a:r>
+              <a:rPr lang="en-US"/>
+              <a:t>Second level</a:t>
+            </a:r>
+          </a:p>
+          <a:p>
+            <a:pPr lvl="2"/>
+            <a:r>
+              <a:rPr lang="en-US"/>
+              <a:t>Third level</a:t>
+            </a:r>
+          </a:p>
+          <a:p>
+            <a:pPr lvl="3"/>
+            <a:r>
+              <a:rPr lang="en-US"/>
+              <a:t>Fourth level</a:t>
+            </a:r>
+          </a:p>
+          <a:p>
+            <a:pPr lvl="4"/>
+            <a:r>
+              <a:rPr lang="en-US"/>
+              <a:t>Fifth level</a:t>
+            </a:r>
+            <a:endParaRPr lang="en-US" dirty="0"/>
+          </a:p>
+        </p:txBody>
+      </p:sp>
+      <p:sp>
+        <p:nvSpPr>
+          <p:cNvPr id="4" name="Text Placeholder 3"/>
+          <p:cNvSpPr>
+            <a:spLocks noGrp="1"/>
+          </p:cNvSpPr>
+          <p:nvPr>
+            <p:ph type="body" sz="half" idx="2"/>
+          </p:nvPr>
+        </p:nvSpPr>
+        <p:spPr>
+          <a:xfrm>
+            <a:off x="841248" y="2099734"/>
+            <a:ext cx="3200400" cy="3810001"/>
+          </a:xfrm>
+        </p:spPr>
+        <p:txBody>
+          <a:bodyPr>
+            <a:normAutofit/>
+          </a:bodyPr>
+          <a:lstStyle>
+            <a:lvl1pPr marL="0" indent="0">
+              <a:lnSpc>
+                <a:spcPct val="114000"/>
+              </a:lnSpc>
+              <a:spcBef>
+                <a:spcPts val="800"/>
+              </a:spcBef>
+              <a:buNone/>
+              <a:defRPr sz="1300"/>
+            </a:lvl1pPr>
+            <a:lvl2pPr marL="457200" indent="0">
+              <a:buNone/>
+              <a:defRPr sz="1200"/>
+            </a:lvl2pPr>
+            <a:lvl3pPr marL="914400" indent="0">
+              <a:buNone/>
+              <a:defRPr sz="1000"/>
+            </a:lvl3pPr>
+            <a:lvl4pPr marL="1371600" indent="0">
+              <a:buNone/>
+              <a:defRPr sz="900"/>
+            </a:lvl4pPr>
+            <a:lvl5pPr marL="1828800" indent="0">
+              <a:buNone/>
+              <a:defRPr sz="900"/>
+            </a:lvl5pPr>
+            <a:lvl6pPr marL="2286000" indent="0">
+              <a:buNone/>
+              <a:defRPr sz="900"/>
+            </a:lvl6pPr>
+            <a:lvl7pPr marL="2743200" indent="0">
+              <a:buNone/>
+              <a:defRPr sz="900"/>
+            </a:lvl7pPr>
+            <a:lvl8pPr marL="3200400" indent="0">
+              <a:buNone/>
+              <a:defRPr sz="900"/>
+            </a:lvl8pPr>
+            <a:lvl9pPr marL="3657600" indent="0">
+              <a:buNone/>
+              <a:defRPr sz="900"/>
+            </a:lvl9pPr>
+          </a:lstStyle>
+          <a:p>
+            <a:pPr lvl="0"/>
+            <a:r>
+              <a:rPr lang="en-US"/>
+              <a:t>Click to edit Master text styles</a:t>
+            </a:r>
+          </a:p>
+        </p:txBody>
+      </p:sp>
+      <p:sp>
+        <p:nvSpPr>
+          <p:cNvPr id="5" name="Date Placeholder 4"/>
+          <p:cNvSpPr>
+            <a:spLocks noGrp="1"/>
+          </p:cNvSpPr>
+          <p:nvPr>
+            <p:ph type="dt" sz="half" idx="10"/>
+          </p:nvPr>
+        </p:nvSpPr>
+        <p:spPr/>
+        <p:txBody>
+          <a:bodyPr/>
+          <a:lstStyle/>
+          <a:p>
+            <a:fld id="{6F53789A-C914-4DB1-8815-80B5EC7335C5}" type="datetimeFigureOut">
+              <a:rPr lang="en-US" dirty="0"/>
+              <a:t>6/5/2026</a:t>
+            </a:fld>
+            <a:endParaRPr lang="en-US" dirty="0"/>
+          </a:p>
+        </p:txBody>
+      </p:sp>
+      <p:sp>
+        <p:nvSpPr>
+          <p:cNvPr id="6" name="Footer Placeholder 5"/>
+          <p:cNvSpPr>
+            <a:spLocks noGrp="1"/>
+          </p:cNvSpPr>
+          <p:nvPr>
+            <p:ph type="ftr" sz="quarter" idx="11"/>
+          </p:nvPr>
+        </p:nvSpPr>
+        <p:spPr/>
+        <p:txBody>
+          <a:bodyPr/>
+          <a:lstStyle/>
+          <a:p>
+            <a:endParaRPr lang="en-US" dirty="0"/>
+          </a:p>
+        </p:txBody>
+      </p:sp>
+      <p:sp>
+        <p:nvSpPr>
+          <p:cNvPr id="7" name="Slide Number Placeholder 6"/>
+          <p:cNvSpPr>
+            <a:spLocks noGrp="1"/>
+          </p:cNvSpPr>
+          <p:nvPr>
+            <p:ph type="sldNum" sz="quarter" idx="12"/>
+          </p:nvPr>
+        </p:nvSpPr>
+        <p:spPr/>
+        <p:txBody>
+          <a:bodyPr/>
+          <a:lstStyle/>
+          <a:p>
+            <a:fld id="{4FAB73BC-B049-4115-A692-8D63A059BFB8}" type="slidenum">
+              <a:rPr lang="en-US" dirty="0"/>
+              <a:t>‹#›</a:t>
+            </a:fld>
+            <a:endParaRPr lang="en-US" dirty="0"/>
+          </a:p>
+        </p:txBody>
+      </p:sp>
+    </p:spTree>
+    <p:extLst>
+      <p:ext uri="{BB962C8B-B14F-4D97-AF65-F5344CB8AC3E}">
+        <p14:creationId xmlns:p14="http://schemas.microsoft.com/office/powerpoint/2010/main" val="3746417707"/>
+      </p:ext>
+    </p:extLst>
+  </p:cSld>
+  <p:clrMapOvr>
+    <a:masterClrMapping/>
+  </p:clrMapOvr>
+</p:sldLayout>
+</file>
+
+<file path=ppt/slideLayouts/slideLayout9.xml><?xml version="1.0" encoding="utf-8"?>
+<p:sldLayout xmlns:a="http://schemas.openxmlformats.org/drawingml/2006/main" xmlns:r="http://schemas.openxmlformats.org/officeDocument/2006/relationships" xmlns:p="http://schemas.openxmlformats.org/presentationml/2006/main" type="picTx" preserve="1">
+  <p:cSld name="Picture with Caption">
+    <p:spTree>
+      <p:nvGrpSpPr>
+        <p:cNvPr id="1" name=""/>
+        <p:cNvGrpSpPr/>
+        <p:nvPr/>
+      </p:nvGrpSpPr>
+      <p:grpSpPr>
+        <a:xfrm>
+          <a:off x="0" y="0"/>
+          <a:ext cx="0" cy="0"/>
+          <a:chOff x="0" y="0"/>
+          <a:chExt cx="0" cy="0"/>
+        </a:xfrm>
+      </p:grpSpPr>
+      <p:sp>
+        <p:nvSpPr>
+          <p:cNvPr id="8" name="Rectangle 7"/>
+          <p:cNvSpPr/>
+          <p:nvPr/>
+        </p:nvSpPr>
+        <p:spPr>
+          <a:xfrm>
+            <a:off x="0" y="5105400"/>
+            <a:ext cx="11292840" cy="1752600"/>
+          </a:xfrm>
+          <a:prstGeom prst="rect">
+            <a:avLst/>
+          </a:prstGeom>
+          <a:solidFill>
+            <a:srgbClr val="000000"/>
+          </a:solidFill>
+          <a:ln>
+            <a:noFill/>
+          </a:ln>
+        </p:spPr>
+        <p:style>
+          <a:lnRef idx="2">
+            <a:schemeClr val="accent1">
+              <a:shade val="50000"/>
+            </a:schemeClr>
+          </a:lnRef>
+          <a:fillRef idx="1">
+            <a:schemeClr val="accent1"/>
+          </a:fillRef>
+          <a:effectRef idx="0">
+            <a:schemeClr val="accent1"/>
+          </a:effectRef>
+          <a:fontRef idx="minor">
+            <a:schemeClr val="lt1"/>
+          </a:fontRef>
+        </p:style>
+      </p:sp>
+      <p:sp>
+        <p:nvSpPr>
+          <p:cNvPr id="2" name="Title 1"/>
+          <p:cNvSpPr>
+            <a:spLocks noGrp="1"/>
+          </p:cNvSpPr>
+          <p:nvPr>
+            <p:ph type="title"/>
+          </p:nvPr>
+        </p:nvSpPr>
+        <p:spPr>
+          <a:xfrm>
+            <a:off x="914400" y="5257800"/>
+            <a:ext cx="9982200" cy="914400"/>
+          </a:xfrm>
+        </p:spPr>
+        <p:txBody>
+          <a:bodyPr anchor="b">
+            <a:normAutofit/>
+          </a:bodyPr>
+          <a:lstStyle>
+            <a:lvl1pPr>
+              <a:defRPr sz="2800" b="0">
+                <a:solidFill>
+                  <a:schemeClr val="bg1"/>
+                </a:solidFill>
+              </a:defRPr>
+            </a:lvl1pPr>
+          </a:lstStyle>
+          <a:p>
+            <a:r>
+              <a:rPr lang="en-US"/>
+              <a:t>Click to edit Master title style</a:t>
+            </a:r>
+            <a:endParaRPr lang="en-US" dirty="0"/>
+          </a:p>
+        </p:txBody>
+      </p:sp>
+      <p:sp>
+        <p:nvSpPr>
+          <p:cNvPr id="3" name="Picture Placeholder 2"/>
+          <p:cNvSpPr>
+            <a:spLocks noGrp="1" noChangeAspect="1"/>
+          </p:cNvSpPr>
+          <p:nvPr>
+            <p:ph type="pic" idx="1"/>
+          </p:nvPr>
+        </p:nvSpPr>
+        <p:spPr>
+          <a:xfrm>
+            <a:off x="0" y="0"/>
+            <a:ext cx="11292840" cy="5128923"/>
+          </a:xfrm>
+          <a:solidFill>
+            <a:schemeClr val="accent1"/>
+          </a:solidFill>
+        </p:spPr>
+        <p:txBody>
+          <a:bodyPr anchor="t"/>
+          <a:lstStyle>
+            <a:lvl1pPr marL="0" indent="0">
+              <a:buNone/>
+              <a:defRPr sz="3200">
+                <a:solidFill>
+                  <a:schemeClr val="bg1"/>
+                </a:solidFill>
+              </a:defRPr>
+            </a:lvl1pPr>
+            <a:lvl2pPr marL="457200" indent="0">
+              <a:buNone/>
+              <a:defRPr sz="2800"/>
+            </a:lvl2pPr>
+            <a:lvl3pPr marL="914400" indent="0">
+              <a:buNone/>
+              <a:defRPr sz="2400"/>
+            </a:lvl3pPr>
+            <a:lvl4pPr marL="1371600" indent="0">
+              <a:buNone/>
+              <a:defRPr sz="2000"/>
+            </a:lvl4pPr>
+            <a:lvl5pPr marL="1828800" indent="0">
+              <a:buNone/>
+              <a:defRPr sz="2000"/>
+            </a:lvl5pPr>
+            <a:lvl6pPr marL="2286000" indent="0">
+              <a:buNone/>
+              <a:defRPr sz="2000"/>
+            </a:lvl6pPr>
+            <a:lvl7pPr marL="2743200" indent="0">
+              <a:buNone/>
+              <a:defRPr sz="2000"/>
+            </a:lvl7pPr>
+            <a:lvl8pPr marL="3200400" indent="0">
+              <a:buNone/>
+              <a:defRPr sz="2000"/>
+            </a:lvl8pPr>
+            <a:lvl9pPr marL="3657600" indent="0">
+              <a:buNone/>
+              <a:defRPr sz="2000"/>
+            </a:lvl9pPr>
+          </a:lstStyle>
+          <a:p>
+            <a:r>
+              <a:rPr lang="en-US"/>
+              <a:t>Click icon to add picture</a:t>
+            </a:r>
+            <a:endParaRPr lang="en-US" dirty="0"/>
+          </a:p>
+        </p:txBody>
+      </p:sp>
+      <p:sp>
+        <p:nvSpPr>
+          <p:cNvPr id="4" name="Text Placeholder 3"/>
+          <p:cNvSpPr>
+            <a:spLocks noGrp="1"/>
+          </p:cNvSpPr>
+          <p:nvPr>
+            <p:ph type="body" sz="half" idx="2"/>
+          </p:nvPr>
+        </p:nvSpPr>
+        <p:spPr>
+          <a:xfrm>
+            <a:off x="914400" y="6108589"/>
+            <a:ext cx="9982200" cy="597011"/>
+          </a:xfrm>
+        </p:spPr>
+        <p:txBody>
+          <a:bodyPr>
+            <a:normAutofit/>
+          </a:bodyPr>
+          <a:lstStyle>
+            <a:lvl1pPr marL="0" indent="0">
+              <a:lnSpc>
+                <a:spcPct val="100000"/>
+              </a:lnSpc>
+              <a:spcBef>
+                <a:spcPts val="800"/>
+              </a:spcBef>
+              <a:buNone/>
+              <a:defRPr sz="1300">
+                <a:solidFill>
+                  <a:schemeClr val="bg1">
+                    <a:lumMod val="85000"/>
+                  </a:schemeClr>
+                </a:solidFill>
+              </a:defRPr>
+            </a:lvl1pPr>
+            <a:lvl2pPr marL="457200" indent="0">
+              <a:buNone/>
+              <a:defRPr sz="1200"/>
+            </a:lvl2pPr>
+            <a:lvl3pPr marL="914400" indent="0">
+              <a:buNone/>
+              <a:defRPr sz="1000"/>
+            </a:lvl3pPr>
+            <a:lvl4pPr marL="1371600" indent="0">
+              <a:buNone/>
+              <a:defRPr sz="900"/>
+            </a:lvl4pPr>
+            <a:lvl5pPr marL="1828800" indent="0">
+              <a:buNone/>
+              <a:defRPr sz="900"/>
+            </a:lvl5pPr>
+            <a:lvl6pPr marL="2286000" indent="0">
+              <a:buNone/>
+              <a:defRPr sz="900"/>
+            </a:lvl6pPr>
+            <a:lvl7pPr marL="2743200" indent="0">
+              <a:buNone/>
+              <a:defRPr sz="900"/>
+            </a:lvl7pPr>
+            <a:lvl8pPr marL="3200400" indent="0">
+              <a:buNone/>
+              <a:defRPr sz="900"/>
+            </a:lvl8pPr>
+            <a:lvl9pPr marL="3657600" indent="0">
+              <a:buNone/>
+              <a:defRPr sz="900"/>
+            </a:lvl9pPr>
+          </a:lstStyle>
+          <a:p>
+            <a:pPr lvl="0"/>
+            <a:r>
+              <a:rPr lang="en-US"/>
+              <a:t>Click to edit Master text styles</a:t>
+            </a:r>
+          </a:p>
+        </p:txBody>
+      </p:sp>
+      <p:sp>
+        <p:nvSpPr>
+          <p:cNvPr id="5" name="Date Placeholder 4"/>
+          <p:cNvSpPr>
+            <a:spLocks noGrp="1"/>
+          </p:cNvSpPr>
+          <p:nvPr>
+            <p:ph type="dt" sz="half" idx="10"/>
+          </p:nvPr>
+        </p:nvSpPr>
+        <p:spPr/>
+        <p:txBody>
+          <a:bodyPr/>
+          <a:lstStyle/>
+          <a:p>
+            <a:fld id="{5E6440AA-91A0-436F-8FDB-C0F939DCAE21}" type="datetimeFigureOut">
+              <a:rPr lang="en-US" dirty="0"/>
+              <a:t>6/5/2026</a:t>
+            </a:fld>
+            <a:endParaRPr lang="en-US" dirty="0"/>
+          </a:p>
+        </p:txBody>
+      </p:sp>
+      <p:sp>
+        <p:nvSpPr>
+          <p:cNvPr id="6" name="Footer Placeholder 5"/>
+          <p:cNvSpPr>
+            <a:spLocks noGrp="1"/>
+          </p:cNvSpPr>
+          <p:nvPr>
+            <p:ph type="ftr" sz="quarter" idx="11"/>
+          </p:nvPr>
+        </p:nvSpPr>
+        <p:spPr/>
+        <p:txBody>
+          <a:bodyPr/>
+          <a:lstStyle/>
+          <a:p>
+            <a:endParaRPr lang="en-US" dirty="0"/>
+          </a:p>
+        </p:txBody>
+      </p:sp>
+      <p:sp>
+        <p:nvSpPr>
+          <p:cNvPr id="7" name="Slide Number Placeholder 6"/>
+          <p:cNvSpPr>
+            <a:spLocks noGrp="1"/>
+          </p:cNvSpPr>
+          <p:nvPr>
+            <p:ph type="sldNum" sz="quarter" idx="12"/>
+          </p:nvPr>
+        </p:nvSpPr>
+        <p:spPr/>
+        <p:txBody>
+          <a:bodyPr/>
+          <a:lstStyle/>
+          <a:p>
+            <a:fld id="{4FAB73BC-B049-4115-A692-8D63A059BFB8}" type="slidenum">
+              <a:rPr lang="en-US" dirty="0"/>
+              <a:t>‹#›</a:t>
+            </a:fld>
+            <a:endParaRPr lang="en-US" dirty="0"/>
+          </a:p>
+        </p:txBody>
+      </p:sp>
+    </p:spTree>
+    <p:extLst>
+      <p:ext uri="{BB962C8B-B14F-4D97-AF65-F5344CB8AC3E}">
+        <p14:creationId xmlns:p14="http://schemas.microsoft.com/office/powerpoint/2010/main" val="3996558640"/>
       </p:ext>
     </p:extLst>
   </p:cSld>
@@ -511,52 +2799,80 @@
       </p:grpSpPr>
       <p:sp>
         <p:nvSpPr>
-          <p:cNvPr id="2" name="Title">
-            <a:extLst>
-              <a:ext uri="{FF2B5EF4-FFF2-40B4-BE49-F238E27FC236}">
-                <a16:creationId xmlns:a16="http://schemas.microsoft.com/office/drawing/2014/main" id="{B682F04C-DEC8-2CC0-6F1F-DB6E1DA96954}"/>
-              </a:ext>
-            </a:extLst>
-          </p:cNvPr>
-          <p:cNvSpPr>
-            <a:spLocks noGrp="1"/>
-          </p:cNvSpPr>
-          <p:nvPr>
-            <p:ph type="title"/>
-          </p:nvPr>
+          <p:cNvPr id="7" name="Rectangle 6"/>
+          <p:cNvSpPr/>
+          <p:nvPr/>
         </p:nvSpPr>
         <p:spPr>
           <a:xfrm>
-            <a:off x="838200" y="365125"/>
-            <a:ext cx="10515600" cy="1325563"/>
+            <a:off x="11292840" y="0"/>
+            <a:ext cx="914400" cy="6858000"/>
+          </a:xfrm>
+          <a:prstGeom prst="rect">
+            <a:avLst/>
+          </a:prstGeom>
+          <a:solidFill>
+            <a:schemeClr val="tx2">
+              <a:lumMod val="75000"/>
+            </a:schemeClr>
+          </a:solidFill>
+          <a:ln>
+            <a:noFill/>
+          </a:ln>
+        </p:spPr>
+        <p:style>
+          <a:lnRef idx="2">
+            <a:schemeClr val="accent1">
+              <a:shade val="50000"/>
+            </a:schemeClr>
+          </a:lnRef>
+          <a:fillRef idx="1">
+            <a:schemeClr val="accent1"/>
+          </a:fillRef>
+          <a:effectRef idx="0">
+            <a:schemeClr val="accent1"/>
+          </a:effectRef>
+          <a:fontRef idx="minor">
+            <a:schemeClr val="lt1"/>
+          </a:fontRef>
+        </p:style>
+      </p:sp>
+      <p:sp>
+        <p:nvSpPr>
+          <p:cNvPr id="2" name="Title Placeholder 1"/>
+          <p:cNvSpPr>
+            <a:spLocks noGrp="1"/>
+          </p:cNvSpPr>
+          <p:nvPr>
+            <p:ph type="title"/>
+          </p:nvPr>
+        </p:nvSpPr>
+        <p:spPr>
+          <a:xfrm>
+            <a:off x="1261872" y="365760"/>
+            <a:ext cx="9692640" cy="1325562"/>
           </a:xfrm>
           <a:prstGeom prst="rect">
             <a:avLst/>
           </a:prstGeom>
         </p:spPr>
         <p:txBody>
-          <a:bodyPr vert="horz" lIns="91440" tIns="45720" rIns="91440" bIns="45720" rtlCol="0" anchor="ctr">
+          <a:bodyPr vert="horz" lIns="91440" tIns="45720" rIns="91440" bIns="45720" rtlCol="0" anchor="b">
             <a:normAutofit/>
           </a:bodyPr>
           <a:lstStyle/>
           <a:p>
             <a:r>
-              <a:rPr lang="en-US" dirty="0"/>
+              <a:rPr lang="en-US"/>
               <a:t>Click to edit Master title style</a:t>
             </a:r>
-            <a:endParaRPr lang="en-GB" dirty="0"/>
-          </a:p>
-        </p:txBody>
-      </p:sp>
-      <p:sp>
-        <p:nvSpPr>
-          <p:cNvPr id="3" name="Body">
-            <a:extLst>
-              <a:ext uri="{FF2B5EF4-FFF2-40B4-BE49-F238E27FC236}">
-                <a16:creationId xmlns:a16="http://schemas.microsoft.com/office/drawing/2014/main" id="{939A8866-BFC3-3A4E-01A5-D3C7ED25190A}"/>
-              </a:ext>
-            </a:extLst>
-          </p:cNvPr>
+            <a:endParaRPr lang="en-US" dirty="0"/>
+          </a:p>
+        </p:txBody>
+      </p:sp>
+      <p:sp>
+        <p:nvSpPr>
+          <p:cNvPr id="3" name="Text Placeholder 2"/>
           <p:cNvSpPr>
             <a:spLocks noGrp="1"/>
           </p:cNvSpPr>
@@ -566,8 +2882,8 @@
         </p:nvSpPr>
         <p:spPr>
           <a:xfrm>
-            <a:off x="838200" y="1825625"/>
-            <a:ext cx="10515600" cy="4351338"/>
+            <a:off x="1261872" y="1828800"/>
+            <a:ext cx="8595360" cy="4351337"/>
           </a:xfrm>
           <a:prstGeom prst="rect">
             <a:avLst/>
@@ -581,53 +2897,186 @@
           <a:p>
             <a:pPr lvl="0"/>
             <a:r>
+              <a:rPr lang="en-US"/>
+              <a:t>Click to edit Master text styles</a:t>
+            </a:r>
+          </a:p>
+          <a:p>
+            <a:pPr lvl="1"/>
+            <a:r>
+              <a:rPr lang="en-US"/>
+              <a:t>Second level</a:t>
+            </a:r>
+          </a:p>
+          <a:p>
+            <a:pPr lvl="2"/>
+            <a:r>
+              <a:rPr lang="en-US"/>
+              <a:t>Third level</a:t>
+            </a:r>
+          </a:p>
+          <a:p>
+            <a:pPr lvl="3"/>
+            <a:r>
+              <a:rPr lang="en-US"/>
+              <a:t>Fourth level</a:t>
+            </a:r>
+          </a:p>
+          <a:p>
+            <a:pPr lvl="4"/>
+            <a:r>
+              <a:rPr lang="en-US"/>
+              <a:t>Fifth level</a:t>
+            </a:r>
+            <a:endParaRPr lang="en-US" dirty="0"/>
+          </a:p>
+        </p:txBody>
+      </p:sp>
+      <p:sp>
+        <p:nvSpPr>
+          <p:cNvPr id="4" name="Date Placeholder 3"/>
+          <p:cNvSpPr>
+            <a:spLocks noGrp="1"/>
+          </p:cNvSpPr>
+          <p:nvPr>
+            <p:ph type="dt" sz="half" idx="2"/>
+          </p:nvPr>
+        </p:nvSpPr>
+        <p:spPr>
+          <a:xfrm rot="16200000">
+            <a:off x="10797542" y="998537"/>
+            <a:ext cx="1904999" cy="365125"/>
+          </a:xfrm>
+          <a:prstGeom prst="rect">
+            <a:avLst/>
+          </a:prstGeom>
+        </p:spPr>
+        <p:txBody>
+          <a:bodyPr vert="horz" lIns="91440" tIns="45720" rIns="91440" bIns="45720" rtlCol="0" anchor="ctr"/>
+          <a:lstStyle>
+            <a:lvl1pPr algn="r">
+              <a:defRPr sz="1050" b="0">
+                <a:solidFill>
+                  <a:schemeClr val="tx2">
+                    <a:lumMod val="20000"/>
+                    <a:lumOff val="80000"/>
+                  </a:schemeClr>
+                </a:solidFill>
+              </a:defRPr>
+            </a:lvl1pPr>
+          </a:lstStyle>
+          <a:p>
+            <a:fld id="{0E59FD0C-5451-4CA0-86AF-E70AE3279989}" type="datetimeFigureOut">
               <a:rPr lang="en-US" dirty="0"/>
-              <a:t>Click to edit Master text styles</a:t>
-            </a:r>
-          </a:p>
-          <a:p>
-            <a:pPr lvl="1"/>
-            <a:r>
+              <a:t>6/5/2026</a:t>
+            </a:fld>
+            <a:endParaRPr lang="en-US" dirty="0"/>
+          </a:p>
+        </p:txBody>
+      </p:sp>
+      <p:sp>
+        <p:nvSpPr>
+          <p:cNvPr id="5" name="Footer Placeholder 4"/>
+          <p:cNvSpPr>
+            <a:spLocks noGrp="1"/>
+          </p:cNvSpPr>
+          <p:nvPr>
+            <p:ph type="ftr" sz="quarter" idx="3"/>
+          </p:nvPr>
+        </p:nvSpPr>
+        <p:spPr>
+          <a:xfrm rot="16200000">
+            <a:off x="9959341" y="4046537"/>
+            <a:ext cx="3581400" cy="365125"/>
+          </a:xfrm>
+          <a:prstGeom prst="rect">
+            <a:avLst/>
+          </a:prstGeom>
+        </p:spPr>
+        <p:txBody>
+          <a:bodyPr vert="horz" lIns="91440" tIns="45720" rIns="91440" bIns="45720" rtlCol="0" anchor="ctr"/>
+          <a:lstStyle>
+            <a:lvl1pPr algn="l">
+              <a:defRPr sz="1050">
+                <a:solidFill>
+                  <a:schemeClr val="tx2">
+                    <a:lumMod val="20000"/>
+                    <a:lumOff val="80000"/>
+                  </a:schemeClr>
+                </a:solidFill>
+              </a:defRPr>
+            </a:lvl1pPr>
+          </a:lstStyle>
+          <a:p>
+            <a:endParaRPr lang="en-US" dirty="0"/>
+          </a:p>
+        </p:txBody>
+      </p:sp>
+      <p:sp>
+        <p:nvSpPr>
+          <p:cNvPr id="6" name="Slide Number Placeholder 5"/>
+          <p:cNvSpPr>
+            <a:spLocks noGrp="1"/>
+          </p:cNvSpPr>
+          <p:nvPr>
+            <p:ph type="sldNum" sz="quarter" idx="4"/>
+          </p:nvPr>
+        </p:nvSpPr>
+        <p:spPr>
+          <a:xfrm>
+            <a:off x="11292840" y="6172200"/>
+            <a:ext cx="914400" cy="593725"/>
+          </a:xfrm>
+          <a:prstGeom prst="rect">
+            <a:avLst/>
+          </a:prstGeom>
+        </p:spPr>
+        <p:txBody>
+          <a:bodyPr vert="horz" lIns="45720" tIns="45720" rIns="45720" bIns="45720" rtlCol="0" anchor="ctr">
+            <a:normAutofit/>
+          </a:bodyPr>
+          <a:lstStyle>
+            <a:lvl1pPr algn="ctr">
+              <a:defRPr sz="3600">
+                <a:solidFill>
+                  <a:schemeClr val="tx2">
+                    <a:lumMod val="60000"/>
+                    <a:lumOff val="40000"/>
+                  </a:schemeClr>
+                </a:solidFill>
+              </a:defRPr>
+            </a:lvl1pPr>
+          </a:lstStyle>
+          <a:p>
+            <a:fld id="{4FAB73BC-B049-4115-A692-8D63A059BFB8}" type="slidenum">
               <a:rPr lang="en-US" dirty="0"/>
-              <a:t>Second level</a:t>
-            </a:r>
-          </a:p>
-          <a:p>
-            <a:pPr lvl="2"/>
-            <a:r>
-              <a:rPr lang="en-US" dirty="0"/>
-              <a:t>Third level</a:t>
-            </a:r>
-          </a:p>
-          <a:p>
-            <a:pPr lvl="3"/>
-            <a:r>
-              <a:rPr lang="en-US" dirty="0"/>
-              <a:t>Fourth level</a:t>
-            </a:r>
-          </a:p>
-          <a:p>
-            <a:pPr lvl="4"/>
-            <a:r>
-              <a:rPr lang="en-US" dirty="0"/>
-              <a:t>Fifth level</a:t>
-            </a:r>
-            <a:endParaRPr lang="en-GB" dirty="0"/>
+              <a:pPr/>
+              <a:t>‹#›</a:t>
+            </a:fld>
+            <a:endParaRPr lang="en-US" dirty="0"/>
           </a:p>
         </p:txBody>
       </p:sp>
     </p:spTree>
     <p:extLst>
       <p:ext uri="{BB962C8B-B14F-4D97-AF65-F5344CB8AC3E}">
-        <p14:creationId xmlns:p14="http://schemas.microsoft.com/office/powerpoint/2010/main" val="3097362788"/>
+        <p14:creationId xmlns:p14="http://schemas.microsoft.com/office/powerpoint/2010/main" val="1525615348"/>
       </p:ext>
     </p:extLst>
   </p:cSld>
   <p:clrMap bg1="lt1" tx1="dk1" bg2="lt2" tx2="dk2" accent1="accent1" accent2="accent2" accent3="accent3" accent4="accent4" accent5="accent5" accent6="accent6" hlink="hlink" folHlink="folHlink"/>
   <p:sldLayoutIdLst>
-    <p:sldLayoutId id="2147483649" r:id="rId1"/>
-    <p:sldLayoutId id="2147483650" r:id="rId2"/>
-    <p:sldLayoutId id="2147483651" r:id="rId3"/>
+    <p:sldLayoutId id="2147483653" r:id="rId1"/>
+    <p:sldLayoutId id="2147483654" r:id="rId2"/>
+    <p:sldLayoutId id="2147483655" r:id="rId3"/>
+    <p:sldLayoutId id="2147483656" r:id="rId4"/>
+    <p:sldLayoutId id="2147483657" r:id="rId5"/>
+    <p:sldLayoutId id="2147483658" r:id="rId6"/>
+    <p:sldLayoutId id="2147483659" r:id="rId7"/>
+    <p:sldLayoutId id="2147483660" r:id="rId8"/>
+    <p:sldLayoutId id="2147483661" r:id="rId9"/>
+    <p:sldLayoutId id="2147483662" r:id="rId10"/>
+    <p:sldLayoutId id="2147483663" r:id="rId11"/>
   </p:sldLayoutIdLst>
   <p:txStyles>
     <p:titleStyle>
@@ -639,7 +3088,7 @@
           <a:spcPct val="0"/>
         </a:spcBef>
         <a:buNone/>
-        <a:defRPr sz="4400" kern="1200">
+        <a:defRPr sz="4400" kern="1200" spc="-50" baseline="0">
           <a:solidFill>
             <a:schemeClr val="tx1"/>
           </a:solidFill>
@@ -650,16 +3099,23 @@
       </a:lvl1pPr>
     </p:titleStyle>
     <p:bodyStyle>
-      <a:lvl1pPr marL="228600" indent="-228600" algn="l" defTabSz="914400" rtl="0" eaLnBrk="1" latinLnBrk="0" hangingPunct="1">
+      <a:lvl1pPr marL="182880" indent="-182880" algn="l" defTabSz="914400" rtl="0" eaLnBrk="1" latinLnBrk="0" hangingPunct="1">
         <a:lnSpc>
-          <a:spcPct val="90000"/>
+          <a:spcPct val="95000"/>
         </a:lnSpc>
         <a:spcBef>
-          <a:spcPts val="1000"/>
+          <a:spcPts val="1400"/>
         </a:spcBef>
-        <a:buFont typeface="Arial" panose="020B0604020202020204" pitchFamily="34" charset="0"/>
+        <a:spcAft>
+          <a:spcPts val="200"/>
+        </a:spcAft>
+        <a:buClr>
+          <a:schemeClr val="accent1"/>
+        </a:buClr>
+        <a:buSzPct val="80000"/>
+        <a:buFont typeface="Arial" pitchFamily="34" charset="0"/>
         <a:buChar char="•"/>
-        <a:defRPr sz="2800" kern="1200">
+        <a:defRPr sz="1800" kern="1200" spc="10" baseline="0">
           <a:solidFill>
             <a:schemeClr val="tx1"/>
           </a:solidFill>
@@ -668,144 +3124,216 @@
           <a:cs typeface="+mn-cs"/>
         </a:defRPr>
       </a:lvl1pPr>
-      <a:lvl2pPr marL="685800" indent="-228600" algn="l" defTabSz="914400" rtl="0" eaLnBrk="1" latinLnBrk="0" hangingPunct="1">
+      <a:lvl2pPr marL="457200" indent="-182880" algn="l" defTabSz="914400" rtl="0" eaLnBrk="1" latinLnBrk="0" hangingPunct="1">
         <a:lnSpc>
           <a:spcPct val="90000"/>
         </a:lnSpc>
         <a:spcBef>
-          <a:spcPts val="500"/>
+          <a:spcPts val="300"/>
         </a:spcBef>
-        <a:buFont typeface="Arial" panose="020B0604020202020204" pitchFamily="34" charset="0"/>
-        <a:buChar char="•"/>
-        <a:defRPr sz="2400" kern="1200">
+        <a:spcAft>
+          <a:spcPts val="300"/>
+        </a:spcAft>
+        <a:buClr>
+          <a:schemeClr val="accent1"/>
+        </a:buClr>
+        <a:buFont typeface="Wingdings 2" pitchFamily="18" charset="2"/>
+        <a:buChar char=""/>
+        <a:defRPr sz="1600" kern="1200">
           <a:solidFill>
-            <a:schemeClr val="tx1"/>
+            <a:schemeClr val="tx1">
+              <a:lumMod val="85000"/>
+              <a:lumOff val="15000"/>
+            </a:schemeClr>
           </a:solidFill>
           <a:latin typeface="+mn-lt"/>
           <a:ea typeface="+mn-ea"/>
           <a:cs typeface="+mn-cs"/>
         </a:defRPr>
       </a:lvl2pPr>
-      <a:lvl3pPr marL="1143000" indent="-228600" algn="l" defTabSz="914400" rtl="0" eaLnBrk="1" latinLnBrk="0" hangingPunct="1">
+      <a:lvl3pPr marL="731520" indent="-182880" algn="l" defTabSz="914400" rtl="0" eaLnBrk="1" latinLnBrk="0" hangingPunct="1">
         <a:lnSpc>
           <a:spcPct val="90000"/>
         </a:lnSpc>
         <a:spcBef>
-          <a:spcPts val="500"/>
+          <a:spcPts val="300"/>
         </a:spcBef>
-        <a:buFont typeface="Arial" panose="020B0604020202020204" pitchFamily="34" charset="0"/>
-        <a:buChar char="•"/>
-        <a:defRPr sz="2000" kern="1200">
+        <a:spcAft>
+          <a:spcPts val="300"/>
+        </a:spcAft>
+        <a:buClr>
+          <a:schemeClr val="accent1"/>
+        </a:buClr>
+        <a:buFont typeface="Wingdings 2" pitchFamily="18" charset="2"/>
+        <a:buChar char=""/>
+        <a:defRPr sz="1400" kern="1200">
           <a:solidFill>
-            <a:schemeClr val="tx1"/>
+            <a:schemeClr val="tx1">
+              <a:lumMod val="85000"/>
+              <a:lumOff val="15000"/>
+            </a:schemeClr>
           </a:solidFill>
           <a:latin typeface="+mn-lt"/>
           <a:ea typeface="+mn-ea"/>
           <a:cs typeface="+mn-cs"/>
         </a:defRPr>
       </a:lvl3pPr>
-      <a:lvl4pPr marL="1600200" indent="-228600" algn="l" defTabSz="914400" rtl="0" eaLnBrk="1" latinLnBrk="0" hangingPunct="1">
+      <a:lvl4pPr marL="1005840" indent="-182880" algn="l" defTabSz="914400" rtl="0" eaLnBrk="1" latinLnBrk="0" hangingPunct="1">
         <a:lnSpc>
           <a:spcPct val="90000"/>
         </a:lnSpc>
         <a:spcBef>
-          <a:spcPts val="500"/>
+          <a:spcPts val="300"/>
         </a:spcBef>
-        <a:buFont typeface="Arial" panose="020B0604020202020204" pitchFamily="34" charset="0"/>
-        <a:buChar char="•"/>
-        <a:defRPr sz="1800" kern="1200">
+        <a:spcAft>
+          <a:spcPts val="300"/>
+        </a:spcAft>
+        <a:buClr>
+          <a:schemeClr val="accent1"/>
+        </a:buClr>
+        <a:buFont typeface="Wingdings 2" pitchFamily="18" charset="2"/>
+        <a:buChar char=""/>
+        <a:defRPr sz="1400" kern="1200">
           <a:solidFill>
-            <a:schemeClr val="tx1"/>
+            <a:schemeClr val="tx1">
+              <a:lumMod val="85000"/>
+              <a:lumOff val="15000"/>
+            </a:schemeClr>
           </a:solidFill>
           <a:latin typeface="+mn-lt"/>
           <a:ea typeface="+mn-ea"/>
           <a:cs typeface="+mn-cs"/>
         </a:defRPr>
       </a:lvl4pPr>
-      <a:lvl5pPr marL="2057400" indent="-228600" algn="l" defTabSz="914400" rtl="0" eaLnBrk="1" latinLnBrk="0" hangingPunct="1">
+      <a:lvl5pPr marL="1280160" indent="-182880" algn="l" defTabSz="914400" rtl="0" eaLnBrk="1" latinLnBrk="0" hangingPunct="1">
         <a:lnSpc>
           <a:spcPct val="90000"/>
         </a:lnSpc>
         <a:spcBef>
-          <a:spcPts val="500"/>
+          <a:spcPts val="300"/>
         </a:spcBef>
-        <a:buFont typeface="Arial" panose="020B0604020202020204" pitchFamily="34" charset="0"/>
-        <a:buChar char="•"/>
-        <a:defRPr sz="1800" kern="1200">
+        <a:spcAft>
+          <a:spcPts val="300"/>
+        </a:spcAft>
+        <a:buClr>
+          <a:schemeClr val="accent1"/>
+        </a:buClr>
+        <a:buFont typeface="Wingdings 2" pitchFamily="18" charset="2"/>
+        <a:buChar char=""/>
+        <a:defRPr sz="1400" kern="1200">
           <a:solidFill>
-            <a:schemeClr val="tx1"/>
+            <a:schemeClr val="tx1">
+              <a:lumMod val="85000"/>
+              <a:lumOff val="15000"/>
+            </a:schemeClr>
           </a:solidFill>
           <a:latin typeface="+mn-lt"/>
           <a:ea typeface="+mn-ea"/>
           <a:cs typeface="+mn-cs"/>
         </a:defRPr>
       </a:lvl5pPr>
-      <a:lvl6pPr marL="2514600" indent="-228600" algn="l" defTabSz="914400" rtl="0" eaLnBrk="1" latinLnBrk="0" hangingPunct="1">
+      <a:lvl6pPr marL="1600000" indent="-228600" algn="l" defTabSz="914400" rtl="0" eaLnBrk="1" latinLnBrk="0" hangingPunct="1">
         <a:lnSpc>
           <a:spcPct val="90000"/>
         </a:lnSpc>
         <a:spcBef>
-          <a:spcPts val="500"/>
+          <a:spcPts val="300"/>
         </a:spcBef>
-        <a:buFont typeface="Arial" panose="020B0604020202020204" pitchFamily="34" charset="0"/>
-        <a:buChar char="•"/>
-        <a:defRPr sz="1800" kern="1200">
+        <a:spcAft>
+          <a:spcPts val="300"/>
+        </a:spcAft>
+        <a:buClr>
+          <a:schemeClr val="accent1"/>
+        </a:buClr>
+        <a:buFont typeface="Wingdings 2" pitchFamily="18" charset="2"/>
+        <a:buChar char=""/>
+        <a:defRPr sz="1400" kern="1200">
           <a:solidFill>
-            <a:schemeClr val="tx1"/>
+            <a:schemeClr val="tx1">
+              <a:lumMod val="85000"/>
+              <a:lumOff val="15000"/>
+            </a:schemeClr>
           </a:solidFill>
           <a:latin typeface="+mn-lt"/>
           <a:ea typeface="+mn-ea"/>
           <a:cs typeface="+mn-cs"/>
         </a:defRPr>
       </a:lvl6pPr>
-      <a:lvl7pPr marL="2971800" indent="-228600" algn="l" defTabSz="914400" rtl="0" eaLnBrk="1" latinLnBrk="0" hangingPunct="1">
+      <a:lvl7pPr marL="1900000" indent="-228600" algn="l" defTabSz="914400" rtl="0" eaLnBrk="1" latinLnBrk="0" hangingPunct="1">
         <a:lnSpc>
           <a:spcPct val="90000"/>
         </a:lnSpc>
         <a:spcBef>
-          <a:spcPts val="500"/>
+          <a:spcPts val="300"/>
         </a:spcBef>
-        <a:buFont typeface="Arial" panose="020B0604020202020204" pitchFamily="34" charset="0"/>
-        <a:buChar char="•"/>
-        <a:defRPr sz="1800" kern="1200">
+        <a:spcAft>
+          <a:spcPts val="300"/>
+        </a:spcAft>
+        <a:buClr>
+          <a:schemeClr val="accent1"/>
+        </a:buClr>
+        <a:buFont typeface="Wingdings 2" pitchFamily="18" charset="2"/>
+        <a:buChar char=""/>
+        <a:defRPr sz="1400" kern="1200">
           <a:solidFill>
-            <a:schemeClr val="tx1"/>
+            <a:schemeClr val="tx1">
+              <a:lumMod val="85000"/>
+              <a:lumOff val="15000"/>
+            </a:schemeClr>
           </a:solidFill>
           <a:latin typeface="+mn-lt"/>
           <a:ea typeface="+mn-ea"/>
           <a:cs typeface="+mn-cs"/>
         </a:defRPr>
       </a:lvl7pPr>
-      <a:lvl8pPr marL="3429000" indent="-228600" algn="l" defTabSz="914400" rtl="0" eaLnBrk="1" latinLnBrk="0" hangingPunct="1">
+      <a:lvl8pPr marL="2200000" indent="-228600" algn="l" defTabSz="914400" rtl="0" eaLnBrk="1" latinLnBrk="0" hangingPunct="1">
         <a:lnSpc>
           <a:spcPct val="90000"/>
         </a:lnSpc>
         <a:spcBef>
-          <a:spcPts val="500"/>
+          <a:spcPts val="300"/>
         </a:spcBef>
-        <a:buFont typeface="Arial" panose="020B0604020202020204" pitchFamily="34" charset="0"/>
-        <a:buChar char="•"/>
-        <a:defRPr sz="1800" kern="1200">
+        <a:spcAft>
+          <a:spcPts val="300"/>
+        </a:spcAft>
+        <a:buClr>
+          <a:schemeClr val="accent1"/>
+        </a:buClr>
+        <a:buFont typeface="Wingdings 2" pitchFamily="18" charset="2"/>
+        <a:buChar char=""/>
+        <a:defRPr sz="1400" kern="1200">
           <a:solidFill>
-            <a:schemeClr val="tx1"/>
+            <a:schemeClr val="tx1">
+              <a:lumMod val="85000"/>
+              <a:lumOff val="15000"/>
+            </a:schemeClr>
           </a:solidFill>
           <a:latin typeface="+mn-lt"/>
           <a:ea typeface="+mn-ea"/>
           <a:cs typeface="+mn-cs"/>
         </a:defRPr>
       </a:lvl8pPr>
-      <a:lvl9pPr marL="3886200" indent="-228600" algn="l" defTabSz="914400" rtl="0" eaLnBrk="1" latinLnBrk="0" hangingPunct="1">
+      <a:lvl9pPr marL="2500000" indent="-228600" algn="l" defTabSz="914400" rtl="0" eaLnBrk="1" latinLnBrk="0" hangingPunct="1">
         <a:lnSpc>
           <a:spcPct val="90000"/>
         </a:lnSpc>
         <a:spcBef>
-          <a:spcPts val="500"/>
+          <a:spcPts val="300"/>
         </a:spcBef>
-        <a:buFont typeface="Arial" panose="020B0604020202020204" pitchFamily="34" charset="0"/>
-        <a:buChar char="•"/>
-        <a:defRPr sz="1800" kern="1200">
+        <a:spcAft>
+          <a:spcPts val="300"/>
+        </a:spcAft>
+        <a:buClr>
+          <a:schemeClr val="accent1"/>
+        </a:buClr>
+        <a:buFont typeface="Wingdings 2" pitchFamily="18" charset="2"/>
+        <a:buChar char=""/>
+        <a:defRPr sz="1400" kern="1200">
           <a:solidFill>
-            <a:schemeClr val="tx1"/>
+            <a:schemeClr val="tx1">
+              <a:lumMod val="85000"/>
+              <a:lumOff val="15000"/>
+            </a:schemeClr>
           </a:solidFill>
           <a:latin typeface="+mn-lt"/>
           <a:ea typeface="+mn-ea"/>
@@ -1153,9 +3681,9 @@
 </file>
 
 <file path=ppt/theme/theme1.xml><?xml version="1.0" encoding="utf-8"?>
-<a:theme xmlns:a="http://schemas.openxmlformats.org/drawingml/2006/main" name="Office Theme">
+<a:theme xmlns:a="http://schemas.openxmlformats.org/drawingml/2006/main" name="View">
   <a:themeElements>
-    <a:clrScheme name="Office">
+    <a:clrScheme name="Blue II">
       <a:dk1>
         <a:sysClr val="windowText" lastClr="000000"/>
       </a:dk1>
@@ -1163,100 +3691,48 @@
         <a:sysClr val="window" lastClr="FFFFFF"/>
       </a:lt1>
       <a:dk2>
-        <a:srgbClr val="44546A"/>
+        <a:srgbClr val="335B74"/>
       </a:dk2>
       <a:lt2>
-        <a:srgbClr val="E7E6E6"/>
+        <a:srgbClr val="DFE3E5"/>
       </a:lt2>
       <a:accent1>
-        <a:srgbClr val="4472C4"/>
+        <a:srgbClr val="1CADE4"/>
       </a:accent1>
       <a:accent2>
-        <a:srgbClr val="ED7D31"/>
+        <a:srgbClr val="2683C6"/>
       </a:accent2>
       <a:accent3>
-        <a:srgbClr val="A5A5A5"/>
+        <a:srgbClr val="27CED7"/>
       </a:accent3>
       <a:accent4>
-        <a:srgbClr val="FFC000"/>
+        <a:srgbClr val="42BA97"/>
       </a:accent4>
       <a:accent5>
-        <a:srgbClr val="5B9BD5"/>
+        <a:srgbClr val="3E8853"/>
       </a:accent5>
       <a:accent6>
-        <a:srgbClr val="70AD47"/>
+        <a:srgbClr val="62A39F"/>
       </a:accent6>
       <a:hlink>
-        <a:srgbClr val="0563C1"/>
+        <a:srgbClr val="6EAC1C"/>
       </a:hlink>
       <a:folHlink>
-        <a:srgbClr val="954F72"/>
+        <a:srgbClr val="B26B02"/>
       </a:folHlink>
     </a:clrScheme>
-    <a:fontScheme name="Office">
+    <a:fontScheme name="View">
       <a:majorFont>
-        <a:latin typeface="Calibri Light" panose="020F0302020204030204"/>
+        <a:latin typeface="Century Schoolbook" panose="02040604050505020304"/>
         <a:ea typeface=""/>
         <a:cs typeface=""/>
-        <a:font script="Jpan" typeface="游ゴシック Light"/>
+        <a:font script="Jpan" typeface="ＭＳ ゴシック"/>
         <a:font script="Hang" typeface="맑은 고딕"/>
-        <a:font script="Hans" typeface="等线 Light"/>
+        <a:font script="Hans" typeface="宋体"/>
         <a:font script="Hant" typeface="新細明體"/>
-        <a:font script="Arab" typeface="Times New Roman"/>
-        <a:font script="Hebr" typeface="Times New Roman"/>
-        <a:font script="Thai" typeface="Angsana New"/>
-        <a:font script="Ethi" typeface="Nyala"/>
-        <a:font script="Beng" typeface="Vrinda"/>
-        <a:font script="Gujr" typeface="Shruti"/>
-        <a:font script="Khmr" typeface="MoolBoran"/>
-        <a:font script="Knda" typeface="Tunga"/>
-        <a:font script="Guru" typeface="Raavi"/>
-        <a:font script="Cans" typeface="Euphemia"/>
-        <a:font script="Cher" typeface="Plantagenet Cherokee"/>
-        <a:font script="Yiii" typeface="Microsoft Yi Baiti"/>
-        <a:font script="Tibt" typeface="Microsoft Himalaya"/>
-        <a:font script="Thaa" typeface="MV Boli"/>
-        <a:font script="Deva" typeface="Mangal"/>
-        <a:font script="Telu" typeface="Gautami"/>
-        <a:font script="Taml" typeface="Latha"/>
-        <a:font script="Syrc" typeface="Estrangelo Edessa"/>
-        <a:font script="Orya" typeface="Kalinga"/>
-        <a:font script="Mlym" typeface="Kartika"/>
-        <a:font script="Laoo" typeface="DokChampa"/>
-        <a:font script="Sinh" typeface="Iskoola Pota"/>
-        <a:font script="Mong" typeface="Mongolian Baiti"/>
-        <a:font script="Viet" typeface="Times New Roman"/>
-        <a:font script="Uigh" typeface="Microsoft Uighur"/>
-        <a:font script="Geor" typeface="Sylfaen"/>
-        <a:font script="Armn" typeface="Arial"/>
-        <a:font script="Bugi" typeface="Leelawadee UI"/>
-        <a:font script="Bopo" typeface="Microsoft JhengHei"/>
-        <a:font script="Java" typeface="Javanese Text"/>
-        <a:font script="Lisu" typeface="Segoe UI"/>
-        <a:font script="Mymr" typeface="Myanmar Text"/>
-        <a:font script="Nkoo" typeface="Ebrima"/>
-        <a:font script="Olck" typeface="Nirmala UI"/>
-        <a:font script="Osma" typeface="Ebrima"/>
-        <a:font script="Phag" typeface="Phagspa"/>
-        <a:font script="Syrn" typeface="Estrangelo Edessa"/>
-        <a:font script="Syrj" typeface="Estrangelo Edessa"/>
-        <a:font script="Syre" typeface="Estrangelo Edessa"/>
-        <a:font script="Sora" typeface="Nirmala UI"/>
-        <a:font script="Tale" typeface="Microsoft Tai Le"/>
-        <a:font script="Talu" typeface="Microsoft New Tai Lue"/>
-        <a:font script="Tfng" typeface="Ebrima"/>
-      </a:majorFont>
-      <a:minorFont>
-        <a:latin typeface="Calibri" panose="020F0502020204030204"/>
-        <a:ea typeface=""/>
-        <a:cs typeface=""/>
-        <a:font script="Jpan" typeface="游ゴシック"/>
-        <a:font script="Hang" typeface="맑은 고딕"/>
-        <a:font script="Hans" typeface="等线"/>
-        <a:font script="Hant" typeface="新細明體"/>
-        <a:font script="Arab" typeface="Arial"/>
-        <a:font script="Hebr" typeface="Arial"/>
-        <a:font script="Thai" typeface="Cordia New"/>
+        <a:font script="Arab" typeface="Tahoma"/>
+        <a:font script="Hebr" typeface="Gisha"/>
+        <a:font script="Thai" typeface="DilleniaUPC"/>
         <a:font script="Ethi" typeface="Nyala"/>
         <a:font script="Beng" typeface="Vrinda"/>
         <a:font script="Gujr" typeface="Shruti"/>
@@ -1277,107 +3753,86 @@
         <a:font script="Laoo" typeface="DokChampa"/>
         <a:font script="Sinh" typeface="Iskoola Pota"/>
         <a:font script="Mong" typeface="Mongolian Baiti"/>
-        <a:font script="Viet" typeface="Arial"/>
+        <a:font script="Viet" typeface="Tahoma"/>
         <a:font script="Uigh" typeface="Microsoft Uighur"/>
         <a:font script="Geor" typeface="Sylfaen"/>
-        <a:font script="Armn" typeface="Arial"/>
-        <a:font script="Bugi" typeface="Leelawadee UI"/>
-        <a:font script="Bopo" typeface="Microsoft JhengHei"/>
-        <a:font script="Java" typeface="Javanese Text"/>
-        <a:font script="Lisu" typeface="Segoe UI"/>
-        <a:font script="Mymr" typeface="Myanmar Text"/>
-        <a:font script="Nkoo" typeface="Ebrima"/>
-        <a:font script="Olck" typeface="Nirmala UI"/>
-        <a:font script="Osma" typeface="Ebrima"/>
-        <a:font script="Phag" typeface="Phagspa"/>
-        <a:font script="Syrn" typeface="Estrangelo Edessa"/>
-        <a:font script="Syrj" typeface="Estrangelo Edessa"/>
-        <a:font script="Syre" typeface="Estrangelo Edessa"/>
-        <a:font script="Sora" typeface="Nirmala UI"/>
-        <a:font script="Tale" typeface="Microsoft Tai Le"/>
-        <a:font script="Talu" typeface="Microsoft New Tai Lue"/>
-        <a:font script="Tfng" typeface="Ebrima"/>
+      </a:majorFont>
+      <a:minorFont>
+        <a:latin typeface="Century Schoolbook" panose="02040604050505020304"/>
+        <a:ea typeface=""/>
+        <a:cs typeface=""/>
+        <a:font script="Jpan" typeface="ＭＳ ゴシック"/>
+        <a:font script="Hang" typeface="맑은 고딕"/>
+        <a:font script="Hans" typeface="宋体"/>
+        <a:font script="Hant" typeface="新細明體"/>
+        <a:font script="Arab" typeface="Tahoma"/>
+        <a:font script="Hebr" typeface="Gisha"/>
+        <a:font script="Thai" typeface="DilleniaUPC"/>
+        <a:font script="Ethi" typeface="Nyala"/>
+        <a:font script="Beng" typeface="Vrinda"/>
+        <a:font script="Gujr" typeface="Shruti"/>
+        <a:font script="Khmr" typeface="DaunPenh"/>
+        <a:font script="Knda" typeface="Tunga"/>
+        <a:font script="Guru" typeface="Raavi"/>
+        <a:font script="Cans" typeface="Euphemia"/>
+        <a:font script="Cher" typeface="Plantagenet Cherokee"/>
+        <a:font script="Yiii" typeface="Microsoft Yi Baiti"/>
+        <a:font script="Tibt" typeface="Microsoft Himalaya"/>
+        <a:font script="Thaa" typeface="MV Boli"/>
+        <a:font script="Deva" typeface="Mangal"/>
+        <a:font script="Telu" typeface="Gautami"/>
+        <a:font script="Taml" typeface="Latha"/>
+        <a:font script="Syrc" typeface="Estrangelo Edessa"/>
+        <a:font script="Orya" typeface="Kalinga"/>
+        <a:font script="Mlym" typeface="Kartika"/>
+        <a:font script="Laoo" typeface="DokChampa"/>
+        <a:font script="Sinh" typeface="Iskoola Pota"/>
+        <a:font script="Mong" typeface="Mongolian Baiti"/>
+        <a:font script="Viet" typeface="Verdana"/>
+        <a:font script="Uigh" typeface="Microsoft Uighur"/>
+        <a:font script="Geor" typeface="Sylfaen"/>
       </a:minorFont>
     </a:fontScheme>
-    <a:fmtScheme name="Office">
+    <a:fmtScheme name="View">
       <a:fillStyleLst>
         <a:solidFill>
           <a:schemeClr val="phClr"/>
         </a:solidFill>
-        <a:gradFill rotWithShape="1">
-          <a:gsLst>
-            <a:gs pos="0">
-              <a:schemeClr val="phClr">
-                <a:lumMod val="110000"/>
-                <a:satMod val="105000"/>
-                <a:tint val="67000"/>
-              </a:schemeClr>
-            </a:gs>
-            <a:gs pos="50000">
-              <a:schemeClr val="phClr">
-                <a:lumMod val="105000"/>
-                <a:satMod val="103000"/>
-                <a:tint val="73000"/>
-              </a:schemeClr>
-            </a:gs>
-            <a:gs pos="100000">
-              <a:schemeClr val="phClr">
-                <a:lumMod val="105000"/>
-                <a:satMod val="109000"/>
-                <a:tint val="81000"/>
-              </a:schemeClr>
-            </a:gs>
-          </a:gsLst>
-          <a:lin ang="5400000" scaled="0"/>
-        </a:gradFill>
-        <a:gradFill rotWithShape="1">
-          <a:gsLst>
-            <a:gs pos="0">
-              <a:schemeClr val="phClr">
-                <a:satMod val="103000"/>
-                <a:lumMod val="102000"/>
-                <a:tint val="94000"/>
-              </a:schemeClr>
-            </a:gs>
-            <a:gs pos="50000">
-              <a:schemeClr val="phClr">
-                <a:satMod val="110000"/>
-                <a:lumMod val="100000"/>
-                <a:shade val="100000"/>
-              </a:schemeClr>
-            </a:gs>
-            <a:gs pos="100000">
-              <a:schemeClr val="phClr">
-                <a:lumMod val="99000"/>
-                <a:satMod val="120000"/>
-                <a:shade val="78000"/>
-              </a:schemeClr>
-            </a:gs>
-          </a:gsLst>
-          <a:lin ang="5400000" scaled="0"/>
-        </a:gradFill>
+        <a:solidFill>
+          <a:schemeClr val="phClr">
+            <a:tint val="60000"/>
+            <a:satMod val="120000"/>
+          </a:schemeClr>
+        </a:solidFill>
+        <a:solidFill>
+          <a:schemeClr val="phClr">
+            <a:shade val="75000"/>
+            <a:satMod val="160000"/>
+          </a:schemeClr>
+        </a:solidFill>
       </a:fillStyleLst>
       <a:lnStyleLst>
-        <a:ln w="6350" cap="flat" cmpd="sng" algn="ctr">
+        <a:ln w="9525" cap="flat" cmpd="sng" algn="ctr">
           <a:solidFill>
             <a:schemeClr val="phClr"/>
           </a:solidFill>
           <a:prstDash val="solid"/>
-          <a:miter lim="800000"/>
         </a:ln>
-        <a:ln w="12700" cap="flat" cmpd="sng" algn="ctr">
+        <a:ln w="13970" cap="flat" cmpd="sng" algn="ctr">
           <a:solidFill>
             <a:schemeClr val="phClr"/>
           </a:solidFill>
           <a:prstDash val="solid"/>
-          <a:miter lim="800000"/>
         </a:ln>
-        <a:ln w="19050" cap="flat" cmpd="sng" algn="ctr">
+        <a:ln w="17145" cap="flat" cmpd="sng" algn="ctr">
           <a:solidFill>
-            <a:schemeClr val="phClr"/>
+            <a:schemeClr val="phClr">
+              <a:shade val="95000"/>
+              <a:alpha val="95000"/>
+              <a:satMod val="150000"/>
+            </a:schemeClr>
           </a:solidFill>
           <a:prstDash val="solid"/>
-          <a:miter lim="800000"/>
         </a:ln>
       </a:lnStyleLst>
       <a:effectStyleLst>
@@ -1385,16 +3840,52 @@
           <a:effectLst/>
         </a:effectStyle>
         <a:effectStyle>
-          <a:effectLst/>
+          <a:effectLst>
+            <a:outerShdw blurRad="50800" dist="15240" dir="5400000" algn="tl" rotWithShape="0">
+              <a:srgbClr val="000000">
+                <a:alpha val="75000"/>
+              </a:srgbClr>
+            </a:outerShdw>
+          </a:effectLst>
+          <a:scene3d>
+            <a:camera prst="orthographicFront">
+              <a:rot lat="0" lon="0" rev="0"/>
+            </a:camera>
+            <a:lightRig rig="brightRoom" dir="tl"/>
+          </a:scene3d>
+          <a:sp3d contourW="9525" prstMaterial="flat">
+            <a:bevelT w="0" h="0" prst="coolSlant"/>
+            <a:contourClr>
+              <a:schemeClr val="phClr">
+                <a:shade val="35000"/>
+                <a:satMod val="130000"/>
+              </a:schemeClr>
+            </a:contourClr>
+          </a:sp3d>
         </a:effectStyle>
         <a:effectStyle>
           <a:effectLst>
-            <a:outerShdw blurRad="57150" dist="19050" dir="5400000" algn="ctr" rotWithShape="0">
+            <a:outerShdw blurRad="76200" dist="25400" dir="5400000" algn="tl" rotWithShape="0">
               <a:srgbClr val="000000">
-                <a:alpha val="63000"/>
+                <a:alpha val="55000"/>
               </a:srgbClr>
             </a:outerShdw>
           </a:effectLst>
+          <a:scene3d>
+            <a:camera prst="orthographicFront">
+              <a:rot lat="0" lon="0" rev="0"/>
+            </a:camera>
+            <a:lightRig rig="brightRoom" dir="tl"/>
+          </a:scene3d>
+          <a:sp3d contourW="19050" prstMaterial="flat">
+            <a:bevelT w="0" h="0" prst="coolSlant"/>
+            <a:contourClr>
+              <a:schemeClr val="phClr">
+                <a:shade val="25000"/>
+                <a:satMod val="140000"/>
+              </a:schemeClr>
+            </a:contourClr>
+          </a:sp3d>
         </a:effectStyle>
       </a:effectStyleLst>
       <a:bgFillStyleLst>
@@ -1411,28 +3902,23 @@
           <a:gsLst>
             <a:gs pos="0">
               <a:schemeClr val="phClr">
-                <a:tint val="93000"/>
-                <a:satMod val="150000"/>
+                <a:tint val="94000"/>
                 <a:shade val="98000"/>
+                <a:satMod val="130000"/>
                 <a:lumMod val="102000"/>
-              </a:schemeClr>
-            </a:gs>
-            <a:gs pos="50000">
-              <a:schemeClr val="phClr">
-                <a:tint val="98000"/>
-                <a:satMod val="130000"/>
-                <a:shade val="90000"/>
-                <a:lumMod val="103000"/>
               </a:schemeClr>
             </a:gs>
             <a:gs pos="100000">
               <a:schemeClr val="phClr">
-                <a:shade val="63000"/>
-                <a:satMod val="120000"/>
+                <a:tint val="98000"/>
+                <a:shade val="78000"/>
+                <a:satMod val="140000"/>
               </a:schemeClr>
             </a:gs>
           </a:gsLst>
-          <a:lin ang="5400000" scaled="0"/>
+          <a:path path="circle">
+            <a:fillToRect l="100000" t="100000" r="100000" b="100000"/>
+          </a:path>
         </a:gradFill>
       </a:bgFillStyleLst>
     </a:fmtScheme>
@@ -1441,7 +3927,7 @@
   <a:extraClrSchemeLst/>
   <a:extLst>
     <a:ext uri="{05A4C25C-085E-4340-85A3-A5531E510DB2}">
-      <thm15:themeFamily xmlns:thm15="http://schemas.microsoft.com/office/thememl/2012/main" name="Office Theme" id="{62F939B6-93AF-4DB8-9C6B-D6C7DFDC589F}" vid="{4A3C46E8-61CC-4603-A589-7422A47A8E4A}"/>
+      <thm15:themeFamily xmlns:thm15="http://schemas.microsoft.com/office/thememl/2012/main" name="View" id="{BA0EB5A6-F2D4-4F82-977B-64ADEE4A2A69}" vid="{3969A8A2-35DB-4E3B-8885-16FD20568674}"/>
     </a:ext>
   </a:extLst>
 </a:theme>
